--- a/02_2d_to_3d/report/2차업무_정승원.pptx
+++ b/02_2d_to_3d/report/2차업무_정승원.pptx
@@ -650,7 +650,7 @@
           </a:p>
           <a:p>
             <a:r>
-              <a:t>0.92 미터로 되살립니다. 마지막 과제 예시 코드는 0.017 미터,</a:t>
+              <a:t>0.92 미터로 되살립니다. 마지막 과제 예시 코드는 0.019 미터,</a:t>
             </a:r>
           </a:p>
           <a:p>
@@ -666,7 +666,7 @@
           </a:p>
           <a:p>
             <a:r>
-              <a:t>5센티미터 안에 든 화소는 96.1 퍼센트 대 33.5 퍼센트입니다.</a:t>
+              <a:t>5센티미터 안에 든 화소는 96.1 퍼센트 대 32.7 퍼센트입니다.</a:t>
             </a:r>
           </a:p>
           <a:p>
@@ -790,7 +790,28 @@
           </a:p>
           <a:p>
             <a:r>
-              <a:t>예시 코드는 4.9 센티미터, 50.8 퍼센트입니다.</a:t>
+              <a:t>예시 코드는 5.6 센티미터, 46.0 퍼센트입니다.</a:t>
+            </a:r>
+          </a:p>
+          <a:p/>
+          <a:p>
+            <a:r>
+              <a:t>채점 화소를 맞춘 점을 짚어 두겠습니다. 스테레오는 정합에 실패한 화소를 버리므로,</a:t>
+            </a:r>
+          </a:p>
+          <a:p>
+            <a:r>
+              <a:t>대조군을 실루엣 전체에서 채점하면 두 방법이 서로 다른 화소에서 채점됩니다. 그래서</a:t>
+            </a:r>
+          </a:p>
+          <a:p>
+            <a:r>
+              <a:t>스테레오가 값을 낸 59 퍼센트 화소에서 대조군도 다시 채점했고, 표의 숫자가</a:t>
+            </a:r>
+          </a:p>
+          <a:p>
+            <a:r>
+              <a:t>그것입니다. 실루엣 전체 기준 수치는 metrics.json 의 full 항목에 함께 남겨 두었습니다.</a:t>
             </a:r>
           </a:p>
           <a:p/>
@@ -5118,6 +5139,30 @@
               <a:t>과제 예시 코드에는 정답에 맞춘 최적 정렬까지 해 줬습니다.</a:t>
             </a:r>
           </a:p>
+          <a:p>
+            <a:pPr algn="l">
+              <a:lnSpc>
+                <a:spcPct val="130000"/>
+              </a:lnSpc>
+              <a:defRPr sz="1000">
+                <a:solidFill>
+                  <a:srgbClr val="4D4D4D"/>
+                </a:solidFill>
+                <a:latin typeface="Pretendard"/>
+              </a:defRPr>
+            </a:pPr>
+            <a:r>
+              <a:rPr sz="1000" b="0">
+                <a:solidFill>
+                  <a:srgbClr val="4D4D4D"/>
+                </a:solidFill>
+                <a:latin typeface="Pretendard"/>
+                <a:ea typeface="Pretendard"/>
+                <a:cs typeface="Pretendard"/>
+              </a:rPr>
+              <a:t>스테레오가 값을 낸 97% 화소에서 둘 다 채점했습니다.</a:t>
+            </a:r>
+          </a:p>
         </p:txBody>
       </p:sp>
       <p:sp>
@@ -5353,7 +5398,7 @@
                 <a:ea typeface="Pretendard"/>
                 <a:cs typeface="Pretendard"/>
               </a:rPr>
-              <a:t>0.017 m</a:t>
+              <a:t>0.019 m</a:t>
             </a:r>
           </a:p>
         </p:txBody>
@@ -5591,7 +5636,7 @@
                 <a:ea typeface="Pretendard"/>
                 <a:cs typeface="Pretendard"/>
               </a:rPr>
-              <a:t>33.5%</a:t>
+              <a:t>32.7%</a:t>
             </a:r>
           </a:p>
         </p:txBody>
@@ -6080,7 +6125,7 @@
                 <a:ea typeface="Pretendard"/>
                 <a:cs typeface="Pretendard"/>
               </a:rPr>
-              <a:t>기준 깊이 = 동봉 메시 40만 점을 z-buffer 로 투영 · 대조군에는 정답에 맞춘 최적 정렬을 적용해 유리한 조건을 부여</a:t>
+              <a:t>기준 깊이 = 동봉 메시 40만 점을 z-buffer 로 투영 · 대조군에는 정답에 맞춘 최적 정렬을 적용해 유리한 조건을 부여 · 스테레오가 값을 낸 59% 화소에서 둘 다 채점</a:t>
             </a:r>
           </a:p>
         </p:txBody>
@@ -6484,7 +6529,7 @@
                 <a:ea typeface="Pretendard"/>
                 <a:cs typeface="Pretendard"/>
               </a:rPr>
-              <a:t>0.0893 m</a:t>
+              <a:t>0.0920 m</a:t>
             </a:r>
           </a:p>
         </p:txBody>
@@ -6579,7 +6624,7 @@
                 <a:ea typeface="Pretendard"/>
                 <a:cs typeface="Pretendard"/>
               </a:rPr>
-              <a:t>4.9 cm</a:t>
+              <a:t>5.6 cm</a:t>
             </a:r>
           </a:p>
         </p:txBody>
@@ -6674,7 +6719,7 @@
                 <a:ea typeface="Pretendard"/>
                 <a:cs typeface="Pretendard"/>
               </a:rPr>
-              <a:t>50.8%</a:t>
+              <a:t>46.0%</a:t>
             </a:r>
           </a:p>
         </p:txBody>

--- a/02_2d_to_3d/report/2차업무_정승원.pptx
+++ b/02_2d_to_3d/report/2차업무_정승원.pptx
@@ -666,7 +666,7 @@
           </a:p>
           <a:p>
             <a:r>
-              <a:t>5센티미터 안에 든 화소는 96.1 퍼센트 대 32.7 퍼센트입니다.</a:t>
+              <a:t>5센티미터 안에 든 화소는 96.1 퍼센트 대 32.8 퍼센트입니다.</a:t>
             </a:r>
           </a:p>
           <a:p>
@@ -677,7 +677,7 @@
           <a:p/>
           <a:p>
             <a:r>
-              <a:t>Unit Test 는 65개입니다. 출력 크기와 자료형만 보면 수식이 틀려도 통과하기 때문에,</a:t>
+              <a:t>Unit Test 는 68개입니다. 출력 크기와 자료형만 보면 수식이 틀려도 통과하기 때문에,</a:t>
             </a:r>
           </a:p>
           <a:p>
@@ -785,12 +785,12 @@
           <a:p/>
           <a:p>
             <a:r>
-              <a:t>수치로는 오차 중앙값 0.9 센티미터, 5센티미터 이내가 90.3 퍼센트입니다.</a:t>
-            </a:r>
-          </a:p>
-          <a:p>
-            <a:r>
-              <a:t>예시 코드는 5.6 센티미터, 46.0 퍼센트입니다.</a:t>
+              <a:t>수치로는 오차 중앙값 0.9 센티미터, 5센티미터 이내가 90.4 퍼센트입니다.</a:t>
+            </a:r>
+          </a:p>
+          <a:p>
+            <a:r>
+              <a:t>예시 코드는 5.5 센티미터, 46.4 퍼센트입니다.</a:t>
             </a:r>
           </a:p>
           <a:p/>
@@ -806,7 +806,7 @@
           </a:p>
           <a:p>
             <a:r>
-              <a:t>스테레오가 값을 낸 59 퍼센트 화소에서 대조군도 다시 채점했고, 표의 숫자가</a:t>
+              <a:t>스테레오가 값을 낸 60 퍼센트 화소에서 대조군도 다시 채점했고, 표의 숫자가</a:t>
             </a:r>
           </a:p>
           <a:p>
@@ -817,23 +817,74 @@
           <a:p/>
           <a:p>
             <a:r>
-              <a:t>이 깊이 맵을 역투영하면 오른쪽 아래 포인트 클라우드가 나옵니다. 4,998점이고</a:t>
-            </a:r>
-          </a:p>
-          <a:p>
-            <a:r>
-              <a:t>정답 메시 대비 Chamfer 거리는 0.0120 입니다.</a:t>
+              <a:t>이 깊이 맵을 역투영하면 오른쪽 아래 포인트 클라우드가 나옵니다. 5,048점이고</a:t>
+            </a:r>
+          </a:p>
+          <a:p>
+            <a:r>
+              <a:t>정답 메시 대비 Chamfer 는 pred→GT 0.0120,</a:t>
+            </a:r>
+          </a:p>
+          <a:p>
+            <a:r>
+              <a:t>GT→pred 0.0441 입니다. 양방향을 함께 보는 이유는 한쪽만으로는</a:t>
+            </a:r>
+          </a:p>
+          <a:p>
+            <a:r>
+              <a:t>무엇이 틀렸는지 구분되지 않기 때문입니다. pred→GT 가 작다는 것은 복원한 점이 전부 표면</a:t>
+            </a:r>
+          </a:p>
+          <a:p>
+            <a:r>
+              <a:t>근처에 있다는 뜻이고, GT→pred 가 그 3.7배라는 것은 정답 표면의 상당 부분이 복원되지</a:t>
+            </a:r>
+          </a:p>
+          <a:p>
+            <a:r>
+              <a:t>않았다는 뜻입니다. 단일 시점이라 뒷면이 비어 있는 것이 숫자로 드러난 것입니다.</a:t>
             </a:r>
           </a:p>
           <a:p/>
           <a:p>
             <a:r>
-              <a:t>한계도 말씀드리겠습니다. 조건을 만족하는 쌍이 후보 20개 중 3개뿐이고,</a:t>
-            </a:r>
-          </a:p>
-          <a:p>
-            <a:r>
-              <a:t>유효 화소는 59 퍼센트입니다. 단일 시점이라 타겟 뒷면은 원리적으로</a:t>
+              <a:t>한 가지 더 말씀드리면, 세로 스테레오 경로에 버그가 있었습니다. 베이스라인이 세로면 영상을</a:t>
+            </a:r>
+          </a:p>
+          <a:p>
+            <a:r>
+              <a:t>90도 돌려 매칭하는데 되돌리지 않고 반환하고 있었습니다. 후보 20쌍 중 10쌍이 세로라 절반을</a:t>
+            </a:r>
+          </a:p>
+          <a:p>
+            <a:r>
+              <a:t>못 쓰고 있었습니다. 영상이 정사각이라 크기가 같아 예외도 나지 않았고, 그 경로를 검증하는</a:t>
+            </a:r>
+          </a:p>
+          <a:p>
+            <a:r>
+              <a:t>테스트도 없었습니다. 고친 뒤 쓸 만한 쌍이 4개가 됐고 되살아난 쌍의 유효화소 77퍼센트가</a:t>
+            </a:r>
+          </a:p>
+          <a:p>
+            <a:r>
+              <a:t>전체에서 가장 높습니다. 회귀 테스트를 붙이고, 수정을 되돌려 실제로 실패하는지까지</a:t>
+            </a:r>
+          </a:p>
+          <a:p>
+            <a:r>
+              <a:t>확인했습니다.</a:t>
+            </a:r>
+          </a:p>
+          <a:p/>
+          <a:p>
+            <a:r>
+              <a:t>한계도 말씀드리겠습니다. 조건을 만족하는 쌍이 후보 20개 중 4개뿐이고,</a:t>
+            </a:r>
+          </a:p>
+          <a:p>
+            <a:r>
+              <a:t>유효 화소는 60 퍼센트입니다. 단일 시점이라 타겟 뒷면은 원리적으로</a:t>
             </a:r>
           </a:p>
           <a:p>
@@ -5636,7 +5687,7 @@
                 <a:ea typeface="Pretendard"/>
                 <a:cs typeface="Pretendard"/>
               </a:rPr>
-              <a:t>32.7%</a:t>
+              <a:t>32.8%</a:t>
             </a:r>
           </a:p>
         </p:txBody>
@@ -5731,7 +5782,7 @@
                 <a:ea typeface="Pretendard SemiBold"/>
                 <a:cs typeface="Pretendard SemiBold"/>
               </a:rPr>
-              <a:t>Unit Test 65개로 수식을 검증</a:t>
+              <a:t>Unit Test 68개로 수식을 검증</a:t>
             </a:r>
           </a:p>
         </p:txBody>
@@ -6125,7 +6176,7 @@
                 <a:ea typeface="Pretendard"/>
                 <a:cs typeface="Pretendard"/>
               </a:rPr>
-              <a:t>기준 깊이 = 동봉 메시 40만 점을 z-buffer 로 투영 · 대조군에는 정답에 맞춘 최적 정렬을 적용해 유리한 조건을 부여 · 스테레오가 값을 낸 59% 화소에서 둘 다 채점</a:t>
+              <a:t>기준 깊이 = 동봉 메시 40만 점을 z-buffer 로 투영 · 대조군에는 정답에 맞춘 최적 정렬을 적용해 유리한 조건을 부여 · 스테레오가 값을 낸 60% 화소에서 둘 다 채점</a:t>
             </a:r>
           </a:p>
         </p:txBody>
@@ -6505,7 +6556,7 @@
                 <a:ea typeface="Pretendard Medium"/>
                 <a:cs typeface="Pretendard Medium"/>
               </a:rPr>
-              <a:t>0.0677 m</a:t>
+              <a:t>0.0675 m</a:t>
             </a:r>
           </a:p>
           <a:p>
@@ -6529,7 +6580,7 @@
                 <a:ea typeface="Pretendard"/>
                 <a:cs typeface="Pretendard"/>
               </a:rPr>
-              <a:t>0.0920 m</a:t>
+              <a:t>0.0918 m</a:t>
             </a:r>
           </a:p>
         </p:txBody>
@@ -6624,7 +6675,7 @@
                 <a:ea typeface="Pretendard"/>
                 <a:cs typeface="Pretendard"/>
               </a:rPr>
-              <a:t>5.6 cm</a:t>
+              <a:t>5.5 cm</a:t>
             </a:r>
           </a:p>
         </p:txBody>
@@ -6695,7 +6746,7 @@
                 <a:ea typeface="Pretendard Medium"/>
                 <a:cs typeface="Pretendard Medium"/>
               </a:rPr>
-              <a:t>90.3%</a:t>
+              <a:t>90.4%</a:t>
             </a:r>
           </a:p>
           <a:p>
@@ -6719,7 +6770,7 @@
                 <a:ea typeface="Pretendard"/>
                 <a:cs typeface="Pretendard"/>
               </a:rPr>
-              <a:t>46.0%</a:t>
+              <a:t>46.4%</a:t>
             </a:r>
           </a:p>
         </p:txBody>
@@ -6766,7 +6817,7 @@
                 <a:ea typeface="Pretendard Medium"/>
                 <a:cs typeface="Pretendard Medium"/>
               </a:rPr>
-              <a:t>포인트 클라우드 4,998점 · 메시 대비 Chamfer 0.0120  →</a:t>
+              <a:t>포인트 클라우드 5,048점 · 메시 대비 Chamfer 0.0120  →</a:t>
             </a:r>
           </a:p>
           <a:p>
@@ -6814,7 +6865,31 @@
                 <a:ea typeface="Pretendard"/>
                 <a:cs typeface="Pretendard"/>
               </a:rPr>
-              <a:t>한계 — 쓸 만한 쌍이 후보 20개 중 3개, 유효화소 59%, 단일 시점이라 뒷면은 복원 불가,</a:t>
+              <a:t>세로 쌍 unrotate 누락 버그를 찾아 고쳐 쓸 만한 쌍이 3 → 4개 (후보 20쌍 중 10쌍이 세로였습니다)</a:t>
+            </a:r>
+          </a:p>
+          <a:p>
+            <a:pPr algn="l">
+              <a:lnSpc>
+                <a:spcPct val="130000"/>
+              </a:lnSpc>
+              <a:defRPr sz="1000">
+                <a:solidFill>
+                  <a:srgbClr val="4D4D4D"/>
+                </a:solidFill>
+                <a:latin typeface="Pretendard"/>
+              </a:defRPr>
+            </a:pPr>
+            <a:r>
+              <a:rPr sz="1000" b="0">
+                <a:solidFill>
+                  <a:srgbClr val="4D4D4D"/>
+                </a:solidFill>
+                <a:latin typeface="Pretendard"/>
+                <a:ea typeface="Pretendard"/>
+                <a:cs typeface="Pretendard"/>
+              </a:rPr>
+              <a:t>한계 — 유효화소 60%, 단일 시점이라 뒷면은 복원 불가(Chamfer GT→pred 0.044),</a:t>
             </a:r>
           </a:p>
           <a:p>

--- a/02_2d_to_3d/report/2차업무_정승원.pptx
+++ b/02_2d_to_3d/report/2차업무_정승원.pptx
@@ -677,7 +677,7 @@
           <a:p/>
           <a:p>
             <a:r>
-              <a:t>Unit Test 는 68개입니다. 출력 크기와 자료형만 보면 수식이 틀려도 통과하기 때문에,</a:t>
+              <a:t>Unit Test 는 69개입니다. 출력 크기와 자료형만 보면 수식이 틀려도 통과하기 때문에,</a:t>
             </a:r>
           </a:p>
           <a:p>
@@ -785,12 +785,12 @@
           <a:p/>
           <a:p>
             <a:r>
-              <a:t>수치로는 오차 중앙값 0.9 센티미터, 5센티미터 이내가 90.4 퍼센트입니다.</a:t>
-            </a:r>
-          </a:p>
-          <a:p>
-            <a:r>
-              <a:t>예시 코드는 5.5 센티미터, 46.4 퍼센트입니다.</a:t>
+              <a:t>수치로는 오차 중앙값 0.9 센티미터, 5센티미터 이내가 91.6 퍼센트입니다.</a:t>
+            </a:r>
+          </a:p>
+          <a:p>
+            <a:r>
+              <a:t>예시 코드는 5.1 센티미터, 49.5 퍼센트입니다.</a:t>
             </a:r>
           </a:p>
           <a:p/>
@@ -817,17 +817,17 @@
           <a:p/>
           <a:p>
             <a:r>
-              <a:t>이 깊이 맵을 역투영하면 오른쪽 아래 포인트 클라우드가 나옵니다. 5,048점이고</a:t>
-            </a:r>
-          </a:p>
-          <a:p>
-            <a:r>
-              <a:t>정답 메시 대비 Chamfer 는 pred→GT 0.0120,</a:t>
-            </a:r>
-          </a:p>
-          <a:p>
-            <a:r>
-              <a:t>GT→pred 0.0441 입니다. 양방향을 함께 보는 이유는 한쪽만으로는</a:t>
+              <a:t>이 깊이 맵을 역투영하면 오른쪽 아래 포인트 클라우드가 나옵니다. 5,711점이고</a:t>
+            </a:r>
+          </a:p>
+          <a:p>
+            <a:r>
+              <a:t>정답 메시 대비 Chamfer 는 pred→GT 0.0128,</a:t>
+            </a:r>
+          </a:p>
+          <a:p>
+            <a:r>
+              <a:t>GT→pred 0.0293 입니다. 양방향을 함께 보는 이유는 한쪽만으로는</a:t>
             </a:r>
           </a:p>
           <a:p>
@@ -879,7 +879,7 @@
           <a:p/>
           <a:p>
             <a:r>
-              <a:t>한계도 말씀드리겠습니다. 조건을 만족하는 쌍이 후보 20개 중 4개뿐이고,</a:t>
+              <a:t>한계도 말씀드리겠습니다. 조건을 만족하는 쌍이 후보 20개 중 5개뿐이고,</a:t>
             </a:r>
           </a:p>
           <a:p>
@@ -5782,7 +5782,7 @@
                 <a:ea typeface="Pretendard SemiBold"/>
                 <a:cs typeface="Pretendard SemiBold"/>
               </a:rPr>
-              <a:t>Unit Test 68개로 수식을 검증</a:t>
+              <a:t>Unit Test 69개로 수식을 검증</a:t>
             </a:r>
           </a:p>
         </p:txBody>
@@ -6556,7 +6556,7 @@
                 <a:ea typeface="Pretendard Medium"/>
                 <a:cs typeface="Pretendard Medium"/>
               </a:rPr>
-              <a:t>0.0675 m</a:t>
+              <a:t>0.0650 m</a:t>
             </a:r>
           </a:p>
           <a:p>
@@ -6580,7 +6580,7 @@
                 <a:ea typeface="Pretendard"/>
                 <a:cs typeface="Pretendard"/>
               </a:rPr>
-              <a:t>0.0918 m</a:t>
+              <a:t>0.0886 m</a:t>
             </a:r>
           </a:p>
         </p:txBody>
@@ -6675,7 +6675,7 @@
                 <a:ea typeface="Pretendard"/>
                 <a:cs typeface="Pretendard"/>
               </a:rPr>
-              <a:t>5.5 cm</a:t>
+              <a:t>5.1 cm</a:t>
             </a:r>
           </a:p>
         </p:txBody>
@@ -6746,7 +6746,7 @@
                 <a:ea typeface="Pretendard Medium"/>
                 <a:cs typeface="Pretendard Medium"/>
               </a:rPr>
-              <a:t>90.4%</a:t>
+              <a:t>91.6%</a:t>
             </a:r>
           </a:p>
           <a:p>
@@ -6770,7 +6770,7 @@
                 <a:ea typeface="Pretendard"/>
                 <a:cs typeface="Pretendard"/>
               </a:rPr>
-              <a:t>46.4%</a:t>
+              <a:t>49.5%</a:t>
             </a:r>
           </a:p>
         </p:txBody>
@@ -6817,7 +6817,7 @@
                 <a:ea typeface="Pretendard Medium"/>
                 <a:cs typeface="Pretendard Medium"/>
               </a:rPr>
-              <a:t>포인트 클라우드 5,048점 · 메시 대비 Chamfer 0.0120  →</a:t>
+              <a:t>포인트 클라우드 5,711점 · 메시 대비 Chamfer 0.0128  →</a:t>
             </a:r>
           </a:p>
           <a:p>
@@ -6865,7 +6865,7 @@
                 <a:ea typeface="Pretendard"/>
                 <a:cs typeface="Pretendard"/>
               </a:rPr>
-              <a:t>세로 쌍 unrotate 누락 버그를 찾아 고쳐 쓸 만한 쌍이 3 → 4개 (후보 20쌍 중 10쌍이 세로였습니다)</a:t>
+              <a:t>세로 쌍 unrotate 누락 버그를 찾아 고쳐 쓸 만한 쌍이 3 → 5개 (후보 20쌍 중 10쌍이 세로였습니다)</a:t>
             </a:r>
           </a:p>
           <a:p>
@@ -6889,7 +6889,7 @@
                 <a:ea typeface="Pretendard"/>
                 <a:cs typeface="Pretendard"/>
               </a:rPr>
-              <a:t>한계 — 유효화소 60%, 단일 시점이라 뒷면은 복원 불가(Chamfer GT→pred 0.044),</a:t>
+              <a:t>한계 — 유효화소 60%, 단일 시점이라 뒷면은 복원 불가(Chamfer GT→pred 0.029),</a:t>
             </a:r>
           </a:p>
           <a:p>

--- a/02_2d_to_3d/report/2차업무_정승원.pptx
+++ b/02_2d_to_3d/report/2차업무_정승원.pptx
@@ -677,7 +677,7 @@
           <a:p/>
           <a:p>
             <a:r>
-              <a:t>Unit Test 는 69개입니다. 출력 크기와 자료형만 보면 수식이 틀려도 통과하기 때문에,</a:t>
+              <a:t>Unit Test 는 70개입니다. 출력 크기와 자료형만 보면 수식이 틀려도 통과하기 때문에,</a:t>
             </a:r>
           </a:p>
           <a:p>
@@ -5004,7 +5004,7 @@
       </p:sp>
       <p:pic>
         <p:nvPicPr>
-          <p:cNvPr id="8" name="Picture 7" descr="01_synthetic_validation.png"/>
+          <p:cNvPr id="8" name="Picture 7" descr="01_synthetic_validation_slide.png"/>
           <p:cNvPicPr>
             <a:picLocks noChangeAspect="1"/>
           </p:cNvPicPr>
@@ -5018,8 +5018,8 @@
         </p:blipFill>
         <p:spPr>
           <a:xfrm>
-            <a:off x="1053846" y="1764792"/>
-            <a:ext cx="10081260" cy="2240280"/>
+            <a:off x="2992549" y="1764792"/>
+            <a:ext cx="6203852" cy="2240280"/>
           </a:xfrm>
           <a:prstGeom prst="rect">
             <a:avLst/>
@@ -5782,7 +5782,7 @@
                 <a:ea typeface="Pretendard SemiBold"/>
                 <a:cs typeface="Pretendard SemiBold"/>
               </a:rPr>
-              <a:t>Unit Test 69개로 수식을 검증</a:t>
+              <a:t>Unit Test 70개로 수식을 검증</a:t>
             </a:r>
           </a:p>
         </p:txBody>
@@ -6278,7 +6278,7 @@
       </p:sp>
       <p:pic>
         <p:nvPicPr>
-          <p:cNvPr id="8" name="Picture 7" descr="03_spe3r_stereo.png"/>
+          <p:cNvPr id="8" name="Picture 7" descr="03_spe3r_stereo_slide.png"/>
           <p:cNvPicPr>
             <a:picLocks noChangeAspect="1"/>
           </p:cNvPicPr>
@@ -6292,8 +6292,8 @@
         </p:blipFill>
         <p:spPr>
           <a:xfrm>
-            <a:off x="1465326" y="1764792"/>
-            <a:ext cx="9258300" cy="2057400"/>
+            <a:off x="3245768" y="1764792"/>
+            <a:ext cx="5697415" cy="2057400"/>
           </a:xfrm>
           <a:prstGeom prst="rect">
             <a:avLst/>

--- a/02_2d_to_3d/report/2차업무_정승원.pptx
+++ b/02_2d_to_3d/report/2차업무_정승원.pptx
@@ -677,7 +677,7 @@
           <a:p/>
           <a:p>
             <a:r>
-              <a:t>Unit Test 는 70개입니다. 출력 크기와 자료형만 보면 수식이 틀려도 통과하기 때문에,</a:t>
+              <a:t>Unit Test 는 72개입니다. 출력 크기와 자료형만 보면 수식이 틀려도 통과하기 때문에,</a:t>
             </a:r>
           </a:p>
           <a:p>
@@ -5782,7 +5782,7 @@
                 <a:ea typeface="Pretendard SemiBold"/>
                 <a:cs typeface="Pretendard SemiBold"/>
               </a:rPr>
-              <a:t>Unit Test 70개로 수식을 검증</a:t>
+              <a:t>Unit Test 72개로 수식을 검증</a:t>
             </a:r>
           </a:p>
         </p:txBody>

--- a/02_2d_to_3d/report/2차업무_정승원.pptx
+++ b/02_2d_to_3d/report/2차업무_정승원.pptx
@@ -8,6 +8,7 @@
     <p:sldId id="256" r:id="rId7"/>
     <p:sldId id="257" r:id="rId9"/>
     <p:sldId id="258" r:id="rId10"/>
+    <p:sldId id="259" r:id="rId11"/>
   </p:sldIdLst>
   <p:sldSz cx="12191695" cy="6858000" type="screen4x3"/>
   <p:notesSz cx="6858000" cy="9144000"/>
@@ -504,56 +505,65 @@
           <a:lstStyle/>
           <a:p>
             <a:r>
-              <a:t>이번 과제는 위성 근접 영상에서 깊이 맵을 만들고 3D 포인트 클라우드로 바꾸는 것입니다.</a:t>
+              <a:t>영상 한 장으로는 깊이를 알 수 없습니다. 한 시선 위의 점이 전부 같은 화소에 맺히기</a:t>
+            </a:r>
+          </a:p>
+          <a:p>
+            <a:r>
+              <a:t>때문입니다. 그래서 시점이 두 개 필요합니다.</a:t>
             </a:r>
           </a:p>
           <a:p/>
           <a:p>
             <a:r>
-              <a:t>영상 한 장으로는 깊이를 알 수 없습니다. 한 시선 위에 있는 점들이 전부 같은 화소에</a:t>
-            </a:r>
-          </a:p>
-          <a:p>
-            <a:r>
-              <a:t>맺히기 때문입니다. 그래서 시점이 두 개 필요합니다.</a:t>
+              <a:t>그런데 이 데이터셋은 카메라가 제자리에 고정돼 있습니다. 포즈 라벨 1,000개를 재보니</a:t>
+            </a:r>
+          </a:p>
+          <a:p>
+            <a:r>
+              <a:t>병진이 항상 0, 0, Z 입니다. 옆으로 1밀리미터도 움직이지 않습니다. 교과서대로면</a:t>
+            </a:r>
+          </a:p>
+          <a:p>
+            <a:r>
+              <a:t>여기서 삼각측량은 불가능합니다.</a:t>
             </a:r>
           </a:p>
           <a:p/>
           <a:p>
             <a:r>
-              <a:t>그런데 쓴 데이터셋은 카메라가 제자리에 고정돼 있습니다. 왼쪽 그림처럼 병진이 항상</a:t>
-            </a:r>
-          </a:p>
-          <a:p>
-            <a:r>
-              <a:t>(0, 0, Z)라서, 카메라 좌표계만 보면 베이스라인이 없습니다.</a:t>
+              <a:t>삼각측량에 필요한 것은 카메라의 절대 운동이 아니라 카메라와 타겟 사이의 상대</a:t>
+            </a:r>
+          </a:p>
+          <a:p>
+            <a:r>
+              <a:t>운동입니다. 이 데이터셋은 타겟이 매 프레임 무작위로 회전하므로, 타겟을 고정으로 놓고</a:t>
+            </a:r>
+          </a:p>
+          <a:p>
+            <a:r>
+              <a:t>보면 카메라가 궤도를 돈 것과 같습니다. 두 뷰의 상대 자세를 계산하면 베이스라인이</a:t>
+            </a:r>
+          </a:p>
+          <a:p>
+            <a:r>
+              <a:t>드러납니다. 회전 4.50도, 거리 5.64미터인 쌍에서 유효 베이스라인</a:t>
+            </a:r>
+          </a:p>
+          <a:p>
+            <a:r>
+              <a:t>0.366미터를 얻었습니다.</a:t>
             </a:r>
           </a:p>
           <a:p/>
           <a:p>
             <a:r>
-              <a:t>대신 타겟이 매 프레임 무작위로 회전합니다. 가운데 그림처럼 타겟을 기준으로 보면</a:t>
-            </a:r>
-          </a:p>
-          <a:p>
-            <a:r>
-              <a:t>카메라가 궤도를 돈 것과 같습니다. 두 뷰의 상대 자세를 계산하면 회전 4.50도짜리</a:t>
-            </a:r>
-          </a:p>
-          <a:p>
-            <a:r>
-              <a:t>쌍에서 베이스라인 0.366 미터가 나옵니다.</a:t>
-            </a:r>
-          </a:p>
-          <a:p/>
-          <a:p>
-            <a:r>
-              <a:t>이걸 평행 정렬하면 오른쪽처럼 표준 삼각측량 공식 Z = f 곱하기 B 나누기 d 를</a:t>
-            </a:r>
-          </a:p>
-          <a:p>
-            <a:r>
-              <a:t>그대로 쓸 수 있습니다. 시차 1픽셀이 깊이 6.8 센티미터에 해당합니다.</a:t>
+              <a:t>이것을 cv2.stereoRectify 에 넣으면 평행 정렬된 쌍이 되어 표준 SGBM 을 그대로 쓸 수</a:t>
+            </a:r>
+          </a:p>
+          <a:p>
+            <a:r>
+              <a:t>있습니다. 시차 1픽셀이 깊이 6.8센티미터에 해당합니다.</a:t>
             </a:r>
           </a:p>
         </p:txBody>
@@ -623,66 +633,65 @@
           <a:lstStyle/>
           <a:p>
             <a:r>
-              <a:t>실제 데이터에 적용하기 전에, 정답을 아는 조건에서 파이프라인이 맞는지 먼저 확인했습니다.</a:t>
+              <a:t>과제 예시의 테스트는 출력 크기와 자료형만 확인합니다. 그것만으로는 수식이 틀려도</a:t>
+            </a:r>
+          </a:p>
+          <a:p>
+            <a:r>
+              <a:t>통과합니다. 그래서 손으로 풀 수 있는 조건을 만들어 수치까지 대조했습니다.</a:t>
             </a:r>
           </a:p>
           <a:p/>
           <a:p>
             <a:r>
-              <a:t>구와 직육면체로 위성을 세우면 광선과 도형의 교차를 손으로 풀 수 있습니다. 그래서</a:t>
-            </a:r>
-          </a:p>
-          <a:p>
-            <a:r>
-              <a:t>정답 깊이에 렌더링 오차가 전혀 없고, 남는 오차는 전부 정합 알고리즘에서 온 것입니다.</a:t>
+              <a:t>구와 직육면체로 위성을 세우면 광선과 도형의 교차를 해석적으로 풀 수 있습니다.</a:t>
+            </a:r>
+          </a:p>
+          <a:p>
+            <a:r>
+              <a:t>정답 깊이에 렌더링 오차가 전혀 없으니, 남는 오차는 전부 정합 알고리즘에서 온</a:t>
+            </a:r>
+          </a:p>
+          <a:p>
+            <a:r>
+              <a:t>것입니다.</a:t>
             </a:r>
           </a:p>
           <a:p/>
           <a:p>
             <a:r>
-              <a:t>오른쪽 세 장을 비교해 주십시오. 네 번째가 정답 깊이인데, 태양전지판 왼쪽 끝과</a:t>
-            </a:r>
-          </a:p>
-          <a:p>
-            <a:r>
-              <a:t>오른쪽 끝이 0.90 미터 차이 납니다. 다섯 번째 스테레오 복원이 그 차이를</a:t>
-            </a:r>
-          </a:p>
-          <a:p>
-            <a:r>
-              <a:t>0.92 미터로 되살립니다. 마지막 과제 예시 코드는 0.019 미터,</a:t>
-            </a:r>
-          </a:p>
-          <a:p>
-            <a:r>
-              <a:t>사실상 평면 하나입니다.</a:t>
+              <a:t>그림 세 장을 같은 색 범위로 놓았습니다. 왼쪽이 정답 깊이인데 태양전지판 양 끝이</a:t>
+            </a:r>
+          </a:p>
+          <a:p>
+            <a:r>
+              <a:t>0.90미터 차이 납니다. 가운데 스테레오가 그 차이를 0.92미터로 되살립니다.</a:t>
+            </a:r>
+          </a:p>
+          <a:p>
+            <a:r>
+              <a:t>오른쪽 과제 예시 코드는 0.019미터, 사실상 평면 하나입니다.</a:t>
             </a:r>
           </a:p>
           <a:p/>
           <a:p>
             <a:r>
-              <a:t>오차 중앙값은 1.0 센티미터 대 7.2 센티미터,</a:t>
-            </a:r>
-          </a:p>
-          <a:p>
-            <a:r>
-              <a:t>5센티미터 안에 든 화소는 96.1 퍼센트 대 32.8 퍼센트입니다.</a:t>
-            </a:r>
-          </a:p>
-          <a:p>
-            <a:r>
-              <a:t>예시 코드에는 정답에 맞춘 최적 정렬까지 해 준 결과입니다.</a:t>
-            </a:r>
-          </a:p>
-          <a:p/>
-          <a:p>
-            <a:r>
-              <a:t>Unit Test 는 72개입니다. 출력 크기와 자료형만 보면 수식이 틀려도 통과하기 때문에,</a:t>
-            </a:r>
-          </a:p>
-          <a:p>
-            <a:r>
-              <a:t>손으로 풀 수 있는 조건을 만들어 수치까지 대조했습니다.</a:t>
+              <a:t>테스트는 네 갈래로 시작했습니다. 해석해 대조, 불변식, 실패 특성화, 경계 조건입니다.</a:t>
+            </a:r>
+          </a:p>
+          <a:p>
+            <a:r>
+              <a:t>여기에 회귀 갈래를 하나 더 붙였습니다. 파이프라인을 검토하면서 실제로 버그를 여러 건</a:t>
+            </a:r>
+          </a:p>
+          <a:p>
+            <a:r>
+              <a:t>찾았고 전부 테스트가 없던 영역에서 나왔기 때문입니다. 고친 뒤에는 수정을 일부러</a:t>
+            </a:r>
+          </a:p>
+          <a:p>
+            <a:r>
+              <a:t>되돌려 해당 테스트가 실제로 실패하는지까지 확인했습니다.</a:t>
             </a:r>
           </a:p>
         </p:txBody>
@@ -752,45 +761,45 @@
           <a:lstStyle/>
           <a:p>
             <a:r>
-              <a:t>실제 SPE3R 위성 영상 결과입니다.</a:t>
+              <a:t>과제가 요구한 마지막 단계, 2D 에서 3D 로의 변환 결과입니다.</a:t>
             </a:r>
           </a:p>
           <a:p/>
           <a:p>
             <a:r>
-              <a:t>왼쪽 두 장이 정렬된 스테레오 쌍입니다. 배경에 지구가 보이고, 타겟이 4.50도</a:t>
-            </a:r>
-          </a:p>
-          <a:p>
-            <a:r>
-              <a:t>돌아간 두 시점입니다. 세 번째가 찾아낸 시차이고, 네 번째가 동봉된 메시로 만든 기준 깊이입니다.</a:t>
+              <a:t>깊이 맵의 각 화소를 카메라 광선을 따라 Z 만큼 밀어내면 3D 점이 됩니다. X 는 u 빼기</a:t>
+            </a:r>
+          </a:p>
+          <a:p>
+            <a:r>
+              <a:t>cx 곱하기 Z 나누기 f 이고 Y 도 같은 식입니다. 세 축이 전부 미터입니다. 과제 예시</a:t>
+            </a:r>
+          </a:p>
+          <a:p>
+            <a:r>
+              <a:t>코드는 X, Y 가 픽셀 인덱스이고 Z 가 0에서 255 밝기값이라 세 축의 단위가 서로 다릅니다.</a:t>
+            </a:r>
+          </a:p>
+          <a:p>
+            <a:r>
+              <a:t>맨 오른쪽이 그것이고 납작한 판으로 나옵니다.</a:t>
             </a:r>
           </a:p>
           <a:p/>
           <a:p>
             <a:r>
-              <a:t>네 번째와 다섯 번째를 비교해 주십시오. 기준 깊이는 위쪽 태양전지판이 노랗고 아래</a:t>
-            </a:r>
-          </a:p>
-          <a:p>
-            <a:r>
-              <a:t>본체로 갈수록 파래지는 그라데이션인데, 스테레오 복원이 그 구조를 그대로 잡아냅니다.</a:t>
-            </a:r>
-          </a:p>
-          <a:p>
-            <a:r>
-              <a:t>반면 맨 오른쪽 과제 예시 코드는 거의 균일한 초록입니다. 깊이 정보가 없다는 뜻입니다.</a:t>
+              <a:t>왼쪽이 정답 메시, 가운데가 스테레오 복원 5,711점입니다.</a:t>
             </a:r>
           </a:p>
           <a:p/>
           <a:p>
             <a:r>
-              <a:t>수치로는 오차 중앙값 0.9 센티미터, 5센티미터 이내가 91.6 퍼센트입니다.</a:t>
-            </a:r>
-          </a:p>
-          <a:p>
-            <a:r>
-              <a:t>예시 코드는 5.1 센티미터, 49.5 퍼센트입니다.</a:t>
+              <a:t>수치는 오차 중앙값 0.9센티미터, 5센티미터 이내가 91.6퍼센트입니다.</a:t>
+            </a:r>
+          </a:p>
+          <a:p>
+            <a:r>
+              <a:t>예시 코드는 5.1센티미터, 49.5퍼센트입니다. 격차가 5.7배입니다.</a:t>
             </a:r>
           </a:p>
           <a:p/>
@@ -806,95 +815,189 @@
           </a:p>
           <a:p>
             <a:r>
-              <a:t>스테레오가 값을 낸 60 퍼센트 화소에서 대조군도 다시 채점했고, 표의 숫자가</a:t>
-            </a:r>
-          </a:p>
-          <a:p>
-            <a:r>
-              <a:t>그것입니다. 실루엣 전체 기준 수치는 metrics.json 의 full 항목에 함께 남겨 두었습니다.</a:t>
+              <a:t>스테레오가 값을 낸 60퍼센트 화소에서 대조군도 다시 채점했고, 표의 숫자가</a:t>
+            </a:r>
+          </a:p>
+          <a:p>
+            <a:r>
+              <a:t>그것입니다.</a:t>
             </a:r>
           </a:p>
           <a:p/>
           <a:p>
             <a:r>
-              <a:t>이 깊이 맵을 역투영하면 오른쪽 아래 포인트 클라우드가 나옵니다. 5,711점이고</a:t>
-            </a:r>
-          </a:p>
-          <a:p>
-            <a:r>
-              <a:t>정답 메시 대비 Chamfer 는 pred→GT 0.0128,</a:t>
-            </a:r>
-          </a:p>
-          <a:p>
-            <a:r>
-              <a:t>GT→pred 0.0293 입니다. 양방향을 함께 보는 이유는 한쪽만으로는</a:t>
-            </a:r>
-          </a:p>
-          <a:p>
-            <a:r>
-              <a:t>무엇이 틀렸는지 구분되지 않기 때문입니다. pred→GT 가 작다는 것은 복원한 점이 전부 표면</a:t>
-            </a:r>
-          </a:p>
-          <a:p>
-            <a:r>
-              <a:t>근처에 있다는 뜻이고, GT→pred 가 그 3.7배라는 것은 정답 표면의 상당 부분이 복원되지</a:t>
-            </a:r>
-          </a:p>
-          <a:p>
-            <a:r>
-              <a:t>않았다는 뜻입니다. 단일 시점이라 뒷면이 비어 있는 것이 숫자로 드러난 것입니다.</a:t>
+              <a:t>Chamfer 는 양방향으로 봐 주십시오. pred 에서 GT 가 0.0128로 작다는 것은 복원한</a:t>
+            </a:r>
+          </a:p>
+          <a:p>
+            <a:r>
+              <a:t>점이 전부 표면 근처에 있다는 뜻이고, GT 에서 pred 가 그 2.3배라는 것은 정답 표면의</a:t>
+            </a:r>
+          </a:p>
+          <a:p>
+            <a:r>
+              <a:t>상당 부분이 복원되지 않았다는 뜻입니다. 단일 시점이라 뒷면이 비어 있는 것이 숫자로</a:t>
+            </a:r>
+          </a:p>
+          <a:p>
+            <a:r>
+              <a:t>드러난 것입니다.</a:t>
+            </a:r>
+          </a:p>
+        </p:txBody>
+      </p:sp>
+      <p:sp>
+        <p:nvSpPr>
+          <p:cNvPr id="4" name="Slide Number Placeholder 3"/>
+          <p:cNvSpPr>
+            <a:spLocks noGrp="1"/>
+          </p:cNvSpPr>
+          <p:nvPr>
+            <p:ph type="sldNum" idx="5" sz="quarter"/>
+          </p:nvPr>
+        </p:nvSpPr>
+        <p:spPr/>
+      </p:sp>
+    </p:spTree>
+  </p:cSld>
+  <p:clrMapOvr>
+    <a:masterClrMapping/>
+  </p:clrMapOvr>
+</p:notes>
+</file>
+
+<file path=ppt/notesSlides/notesSlide4.xml><?xml version="1.0" encoding="utf-8"?>
+<p:notes xmlns:a="http://schemas.openxmlformats.org/drawingml/2006/main" xmlns:p="http://schemas.openxmlformats.org/presentationml/2006/main" xmlns:r="http://schemas.openxmlformats.org/officeDocument/2006/relationships">
+  <p:cSld>
+    <p:spTree>
+      <p:nvGrpSpPr>
+        <p:cNvPr id="1" name=""/>
+        <p:cNvGrpSpPr/>
+        <p:nvPr/>
+      </p:nvGrpSpPr>
+      <p:grpSpPr>
+        <a:xfrm>
+          <a:off x="0" y="0"/>
+          <a:ext cx="0" cy="0"/>
+          <a:chOff x="0" y="0"/>
+          <a:chExt cx="0" cy="0"/>
+        </a:xfrm>
+      </p:grpSpPr>
+      <p:sp>
+        <p:nvSpPr>
+          <p:cNvPr id="2" name="Slide Image Placeholder 1"/>
+          <p:cNvSpPr>
+            <a:spLocks noGrp="1"/>
+          </p:cNvSpPr>
+          <p:nvPr>
+            <p:ph type="sldImg" idx="2"/>
+          </p:nvPr>
+        </p:nvSpPr>
+        <p:spPr/>
+      </p:sp>
+      <p:sp>
+        <p:nvSpPr>
+          <p:cNvPr id="3" name="Notes Placeholder 2"/>
+          <p:cNvSpPr>
+            <a:spLocks noGrp="1"/>
+          </p:cNvSpPr>
+          <p:nvPr>
+            <p:ph type="body" idx="3" sz="quarter"/>
+          </p:nvPr>
+        </p:nvSpPr>
+        <p:spPr/>
+        <p:txBody>
+          <a:bodyPr/>
+          <a:lstStyle/>
+          <a:p>
+            <a:r>
+              <a:t>개선점입니다. 재 본 것만 적었습니다.</a:t>
             </a:r>
           </a:p>
           <a:p/>
           <a:p>
             <a:r>
-              <a:t>한 가지 더 말씀드리면, 세로 스테레오 경로에 버그가 있었습니다. 베이스라인이 세로면 영상을</a:t>
-            </a:r>
-          </a:p>
-          <a:p>
-            <a:r>
-              <a:t>90도 돌려 매칭하는데 되돌리지 않고 반환하고 있었습니다. 후보 20쌍 중 10쌍이 세로라 절반을</a:t>
-            </a:r>
-          </a:p>
-          <a:p>
-            <a:r>
-              <a:t>못 쓰고 있었습니다. 영상이 정사각이라 크기가 같아 예외도 나지 않았고, 그 경로를 검증하는</a:t>
-            </a:r>
-          </a:p>
-          <a:p>
-            <a:r>
-              <a:t>테스트도 없었습니다. 고친 뒤 쓸 만한 쌍이 4개가 됐고 되살아난 쌍의 유효화소 77퍼센트가</a:t>
-            </a:r>
-          </a:p>
-          <a:p>
-            <a:r>
-              <a:t>전체에서 가장 높습니다. 회귀 테스트를 붙이고, 수정을 되돌려 실제로 실패하는지까지</a:t>
-            </a:r>
-          </a:p>
-          <a:p>
-            <a:r>
-              <a:t>확인했습니다.</a:t>
+              <a:t>가장 큰 약점은 유효화소 60퍼센트입니다. 나머지는 답을 내지 못한 것이지</a:t>
+            </a:r>
+          </a:p>
+          <a:p>
+            <a:r>
+              <a:t>맞힌 것이 아닙니다. 앞 장의 정확도 수치는 전부 이 안에서 잰 값입니다.</a:t>
             </a:r>
           </a:p>
           <a:p/>
           <a:p>
             <a:r>
-              <a:t>한계도 말씀드리겠습니다. 조건을 만족하는 쌍이 후보 20개 중 5개뿐이고,</a:t>
-            </a:r>
-          </a:p>
-          <a:p>
-            <a:r>
-              <a:t>유효 화소는 60 퍼센트입니다. 단일 시점이라 타겟 뒷면은 원리적으로</a:t>
-            </a:r>
-          </a:p>
-          <a:p>
-            <a:r>
-              <a:t>복원되지 않고, 자세는 데이터셋이 준 정답을 그대로 썼습니다. 실제 상대항법에서는</a:t>
-            </a:r>
-          </a:p>
-          <a:p>
-            <a:r>
-              <a:t>자세도 추정해야 하고 그 오차가 삼각측량에 미치는 영향은 이번에 측정하지 않았습니다.</a:t>
+              <a:t>첫 번째 후보는 시차 탐색 범위입니다. 타겟의 경계 반지름을 알면 깊이가 어느 구간에</a:t>
+            </a:r>
+          </a:p>
+          <a:p>
+            <a:r>
+              <a:t>있는지 알고, 따라서 시차도 그렇습니다. 최적 쌍에서 물리적으로 가능한 폭은 24픽셀인데</a:t>
+            </a:r>
+          </a:p>
+          <a:p>
+            <a:r>
+              <a:t>지금은 144픽셀을 훑고 있습니다. 좁혀 보니 유효화소가 60에서 81퍼센트로</a:t>
+            </a:r>
+          </a:p>
+          <a:p>
+            <a:r>
+              <a:t>올랐습니다.</a:t>
+            </a:r>
+          </a:p>
+          <a:p/>
+          <a:p>
+            <a:r>
+              <a:t>그런데 공짜가 아닙니다. 다른 쌍에서는 커버리지만 오르고 정확도가 떨어집니다. 탐색</a:t>
+            </a:r>
+          </a:p>
+          <a:p>
+            <a:r>
+              <a:t>후보가 줄면 uniquenessRatio 검사를 통과하기 쉬워져서, 원래는 기각됐을 애매한 대응이</a:t>
+            </a:r>
+          </a:p>
+          <a:p>
+            <a:r>
+              <a:t>살아남기 때문입니다. 트레이드오프라 기본값으로 채택하지 않고 측정값만 남겼습니다.</a:t>
+            </a:r>
+          </a:p>
+          <a:p/>
+          <a:p>
+            <a:r>
+              <a:t>두 번째는 다중 뷰 융합입니다. 지금은 한 쌍만 씁니다. 쓸 만한 쌍이 5개 있으니</a:t>
+            </a:r>
+          </a:p>
+          <a:p>
+            <a:r>
+              <a:t>여러 쌍의 깊이를 합치면 한 쌍에서 비는 부분을 다른 쌍이 채웁니다. 지금 구조에서 가장</a:t>
+            </a:r>
+          </a:p>
+          <a:p>
+            <a:r>
+              <a:t>싸게 얻을 수 있는 개선이라고 봅니다. 이건 아직 재 보지 않았습니다.</a:t>
+            </a:r>
+          </a:p>
+          <a:p/>
+          <a:p>
+            <a:r>
+              <a:t>위 그림은 쌍별 결과입니다. 베이스라인이 크다고 정확한 것이 아니고, 커버리지와</a:t>
+            </a:r>
+          </a:p>
+          <a:p>
+            <a:r>
+              <a:t>정확도가 함께 가지도 않는다는 것이 보입니다.</a:t>
+            </a:r>
+          </a:p>
+          <a:p/>
+          <a:p>
+            <a:r>
+              <a:t>한계도 함께 말씀드리면, 자세는 데이터셋이 준 정답을 그대로 썼고, 위성은 한 종만</a:t>
+            </a:r>
+          </a:p>
+          <a:p>
+            <a:r>
+              <a:t>실험했으며, 깊이 분해능 하한이 6.8 센티미터 퍼 픽셀입니다.</a:t>
             </a:r>
           </a:p>
         </p:txBody>
@@ -4025,7 +4128,7 @@
               </a:defRPr>
             </a:pPr>
             <a:r>
-              <a:rPr sz="2700" b="0">
+              <a:rPr sz="2700" b="0" spc="-108">
                 <a:solidFill>
                   <a:srgbClr val="171717"/>
                 </a:solidFill>
@@ -4127,7 +4230,7 @@
                 <a:ea typeface="Cascadia Mono"/>
                 <a:cs typeface="Cascadia Mono"/>
               </a:rPr>
-              <a:t>01 / 03</a:t>
+              <a:t>01 / 04</a:t>
             </a:r>
           </a:p>
         </p:txBody>
@@ -4140,12 +4243,12 @@
         </p:nvSpPr>
         <p:spPr>
           <a:xfrm>
-            <a:off x="658368" y="1627632"/>
-            <a:ext cx="10872216" cy="2514600"/>
+            <a:off x="658368" y="1554480"/>
+            <a:ext cx="10872216" cy="2889504"/>
           </a:xfrm>
           <a:prstGeom prst="roundRect">
             <a:avLst>
-              <a:gd name="adj" fmla="val 4545"/>
+              <a:gd name="adj" fmla="val 3955"/>
             </a:avLst>
           </a:prstGeom>
           <a:solidFill>
@@ -4196,8 +4299,8 @@
         </p:blipFill>
         <p:spPr>
           <a:xfrm>
-            <a:off x="1786245" y="1764792"/>
-            <a:ext cx="8616461" cy="2240280"/>
+            <a:off x="1065275" y="1691639"/>
+            <a:ext cx="10058400" cy="2615184"/>
           </a:xfrm>
           <a:prstGeom prst="rect">
             <a:avLst/>
@@ -4212,12 +4315,12 @@
         </p:nvSpPr>
         <p:spPr>
           <a:xfrm>
-            <a:off x="658368" y="4370832"/>
-            <a:ext cx="5358384" cy="1892807"/>
+            <a:off x="658368" y="4590288"/>
+            <a:ext cx="5358384" cy="1700784"/>
           </a:xfrm>
           <a:prstGeom prst="roundRect">
             <a:avLst>
-              <a:gd name="adj" fmla="val 6038"/>
+              <a:gd name="adj" fmla="val 6720"/>
             </a:avLst>
           </a:prstGeom>
           <a:solidFill>
@@ -4260,7 +4363,7 @@
         </p:nvSpPr>
         <p:spPr>
           <a:xfrm>
-            <a:off x="896112" y="4544568"/>
+            <a:off x="896112" y="4764024"/>
             <a:ext cx="4882896" cy="219456"/>
           </a:xfrm>
           <a:prstGeom prst="rect">
@@ -4307,8 +4410,8 @@
         </p:nvSpPr>
         <p:spPr>
           <a:xfrm>
-            <a:off x="896112" y="4791456"/>
-            <a:ext cx="4882896" cy="1289303"/>
+            <a:off x="896112" y="5010912"/>
+            <a:ext cx="4882896" cy="1097280"/>
           </a:xfrm>
           <a:prstGeom prst="rect">
             <a:avLst/>
@@ -4440,30 +4543,6 @@
               <a:t>대신 타겟이 매 프레임 무작위로 회전합니다.</a:t>
             </a:r>
           </a:p>
-          <a:p>
-            <a:pPr algn="l">
-              <a:lnSpc>
-                <a:spcPct val="130000"/>
-              </a:lnSpc>
-              <a:defRPr sz="1000">
-                <a:solidFill>
-                  <a:srgbClr val="4D4D4D"/>
-                </a:solidFill>
-                <a:latin typeface="Pretendard"/>
-              </a:defRPr>
-            </a:pPr>
-            <a:r>
-              <a:rPr sz="1000" b="0">
-                <a:solidFill>
-                  <a:srgbClr val="4D4D4D"/>
-                </a:solidFill>
-                <a:latin typeface="Pretendard"/>
-                <a:ea typeface="Pretendard"/>
-                <a:cs typeface="Pretendard"/>
-              </a:rPr>
-              <a:t>이 회전이 카메라를 궤도에 올린 것과 같은 효과를 냅니다.</a:t>
-            </a:r>
-          </a:p>
         </p:txBody>
       </p:sp>
       <p:sp>
@@ -4474,12 +4553,12 @@
         </p:nvSpPr>
         <p:spPr>
           <a:xfrm>
-            <a:off x="6364224" y="4370832"/>
-            <a:ext cx="5166360" cy="1892807"/>
+            <a:off x="6364224" y="4590288"/>
+            <a:ext cx="5166360" cy="1700784"/>
           </a:xfrm>
           <a:prstGeom prst="roundRect">
             <a:avLst>
-              <a:gd name="adj" fmla="val 6038"/>
+              <a:gd name="adj" fmla="val 6720"/>
             </a:avLst>
           </a:prstGeom>
           <a:solidFill>
@@ -4522,7 +4601,7 @@
         </p:nvSpPr>
         <p:spPr>
           <a:xfrm>
-            <a:off x="6601968" y="4544568"/>
+            <a:off x="6601968" y="4764024"/>
             <a:ext cx="4690872" cy="219456"/>
           </a:xfrm>
           <a:prstGeom prst="rect">
@@ -4569,8 +4648,8 @@
         </p:nvSpPr>
         <p:spPr>
           <a:xfrm>
-            <a:off x="6601968" y="4791456"/>
-            <a:ext cx="4690872" cy="1289303"/>
+            <a:off x="6601968" y="5010912"/>
+            <a:ext cx="4690872" cy="1097280"/>
           </a:xfrm>
           <a:prstGeom prst="rect">
             <a:avLst/>
@@ -4808,7 +4887,7 @@
                 <a:ea typeface="Cascadia Mono"/>
                 <a:cs typeface="Cascadia Mono"/>
               </a:rPr>
-              <a:t>02 / 검증</a:t>
+              <a:t>02 / Unit Test</a:t>
             </a:r>
           </a:p>
         </p:txBody>
@@ -4847,7 +4926,7 @@
               </a:defRPr>
             </a:pPr>
             <a:r>
-              <a:rPr sz="2700" b="0">
+              <a:rPr sz="2700" b="0" spc="-108">
                 <a:solidFill>
                   <a:srgbClr val="171717"/>
                 </a:solidFill>
@@ -4855,7 +4934,7 @@
                 <a:ea typeface="Pretendard SemiBold"/>
                 <a:cs typeface="Pretendard SemiBold"/>
               </a:rPr>
-              <a:t>정답 깊이 폭 0.90 m 를 0.92 m 로 복원</a:t>
+              <a:t>출력 크기와 자료형만 보면 수식이 틀려도 통과합니다</a:t>
             </a:r>
           </a:p>
         </p:txBody>
@@ -4902,7 +4981,7 @@
                 <a:ea typeface="Pretendard"/>
                 <a:cs typeface="Pretendard"/>
               </a:rPr>
-              <a:t>구와 직육면체로 위성을 세우고 광선 교차를 해석적으로 풀면 정답 깊이에 오차가 없다 · 남는 오차는 전부 정합에서 온다</a:t>
+              <a:t>pytest 72개 · 손으로 풀 수 있는 조건을 만들어 수치까지 대조 · 실행 결과는 outputs/pytest_report.txt 에 저장</a:t>
             </a:r>
           </a:p>
         </p:txBody>
@@ -4949,7 +5028,7 @@
                 <a:ea typeface="Cascadia Mono"/>
                 <a:cs typeface="Cascadia Mono"/>
               </a:rPr>
-              <a:t>02 / 03</a:t>
+              <a:t>02 / 04</a:t>
             </a:r>
           </a:p>
         </p:txBody>
@@ -4962,12 +5041,12 @@
         </p:nvSpPr>
         <p:spPr>
           <a:xfrm>
-            <a:off x="658368" y="1627632"/>
-            <a:ext cx="10872216" cy="2514600"/>
+            <a:off x="658368" y="1554480"/>
+            <a:ext cx="10872216" cy="2889504"/>
           </a:xfrm>
           <a:prstGeom prst="roundRect">
             <a:avLst>
-              <a:gd name="adj" fmla="val 4545"/>
+              <a:gd name="adj" fmla="val 3955"/>
             </a:avLst>
           </a:prstGeom>
           <a:solidFill>
@@ -5018,8 +5097,8 @@
         </p:blipFill>
         <p:spPr>
           <a:xfrm>
-            <a:off x="2992549" y="1764792"/>
-            <a:ext cx="6203852" cy="2240280"/>
+            <a:off x="1416258" y="1691639"/>
+            <a:ext cx="9356435" cy="2615184"/>
           </a:xfrm>
           <a:prstGeom prst="rect">
             <a:avLst/>
@@ -5034,12 +5113,12 @@
         </p:nvSpPr>
         <p:spPr>
           <a:xfrm>
-            <a:off x="658368" y="4370832"/>
-            <a:ext cx="5358384" cy="1892807"/>
+            <a:off x="658368" y="4590288"/>
+            <a:ext cx="5358384" cy="1700784"/>
           </a:xfrm>
           <a:prstGeom prst="roundRect">
             <a:avLst>
-              <a:gd name="adj" fmla="val 6038"/>
+              <a:gd name="adj" fmla="val 6720"/>
             </a:avLst>
           </a:prstGeom>
           <a:solidFill>
@@ -5082,7 +5161,7 @@
         </p:nvSpPr>
         <p:spPr>
           <a:xfrm>
-            <a:off x="896112" y="4544568"/>
+            <a:off x="896112" y="4764024"/>
             <a:ext cx="4882896" cy="219456"/>
           </a:xfrm>
           <a:prstGeom prst="rect">
@@ -5116,7 +5195,7 @@
                 <a:ea typeface="Pretendard SemiBold"/>
                 <a:cs typeface="Pretendard SemiBold"/>
               </a:rPr>
-              <a:t>같은 영상, 두 가지 방법</a:t>
+              <a:t>정답 깊이에 오차가 없는 조건을 만든다</a:t>
             </a:r>
           </a:p>
         </p:txBody>
@@ -5129,8 +5208,8 @@
         </p:nvSpPr>
         <p:spPr>
           <a:xfrm>
-            <a:off x="896112" y="4791456"/>
-            <a:ext cx="4882896" cy="1289303"/>
+            <a:off x="896112" y="5010912"/>
+            <a:ext cx="4882896" cy="1097280"/>
           </a:xfrm>
           <a:prstGeom prst="rect">
             <a:avLst/>
@@ -5163,7 +5242,7 @@
                 <a:ea typeface="Pretendard"/>
                 <a:cs typeface="Pretendard"/>
               </a:rPr>
-              <a:t>왼쪽·오른쪽 영상을 만들고 두 방법으로 깊이를 구했습니다.</a:t>
+              <a:t>구와 직육면체로 위성을 세우면 광선과 도형의 교차를</a:t>
             </a:r>
           </a:p>
           <a:p>
@@ -5187,7 +5266,7 @@
                 <a:ea typeface="Pretendard"/>
                 <a:cs typeface="Pretendard"/>
               </a:rPr>
-              <a:t>과제 예시 코드에는 정답에 맞춘 최적 정렬까지 해 줬습니다.</a:t>
+              <a:t>손으로 풀 수 있습니다. 정답에 렌더링 오차가 0 이므로</a:t>
             </a:r>
           </a:p>
           <a:p>
@@ -5211,48 +5290,25 @@
                 <a:ea typeface="Pretendard"/>
                 <a:cs typeface="Pretendard"/>
               </a:rPr>
-              <a:t>스테레오가 값을 낸 97% 화소에서 둘 다 채점했습니다.</a:t>
-            </a:r>
-          </a:p>
-        </p:txBody>
-      </p:sp>
-      <p:sp>
-        <p:nvSpPr>
-          <p:cNvPr id="12" name="TextBox 11"/>
-          <p:cNvSpPr txBox="1"/>
-          <p:nvPr/>
-        </p:nvSpPr>
-        <p:spPr>
-          <a:xfrm>
-            <a:off x="896112" y="5212080"/>
-            <a:ext cx="1417320" cy="859536"/>
-          </a:xfrm>
-          <a:prstGeom prst="rect">
-            <a:avLst/>
-          </a:prstGeom>
-          <a:noFill/>
-        </p:spPr>
-        <p:txBody>
-          <a:bodyPr wrap="none" lIns="0" rIns="0" tIns="0" bIns="0">
-            <a:spAutoFit/>
-          </a:bodyPr>
-          <a:lstStyle/>
+              <a:t>남는 오차는 전부 정합 알고리즘에서 온 것입니다.</a:t>
+            </a:r>
+          </a:p>
           <a:p>
             <a:pPr algn="l">
               <a:lnSpc>
-                <a:spcPct val="145000"/>
+                <a:spcPct val="130000"/>
               </a:lnSpc>
-              <a:defRPr sz="900">
-                <a:solidFill>
-                  <a:srgbClr val="8F8F8F"/>
+              <a:defRPr sz="400">
+                <a:solidFill>
+                  <a:srgbClr val="4D4D4D"/>
                 </a:solidFill>
                 <a:latin typeface="Pretendard"/>
               </a:defRPr>
             </a:pPr>
             <a:r>
-              <a:rPr sz="900" b="0">
-                <a:solidFill>
-                  <a:srgbClr val="8F8F8F"/>
+              <a:rPr sz="400" b="0">
+                <a:solidFill>
+                  <a:srgbClr val="4D4D4D"/>
                 </a:solidFill>
                 <a:latin typeface="Pretendard"/>
                 <a:ea typeface="Pretendard"/>
@@ -5264,31 +5320,7 @@
           <a:p>
             <a:pPr algn="l">
               <a:lnSpc>
-                <a:spcPct val="145000"/>
-              </a:lnSpc>
-              <a:defRPr sz="1000">
-                <a:solidFill>
-                  <a:srgbClr val="4D4D4D"/>
-                </a:solidFill>
-                <a:latin typeface="Pretendard"/>
-              </a:defRPr>
-            </a:pPr>
-            <a:r>
-              <a:rPr sz="1000" b="0">
-                <a:solidFill>
-                  <a:srgbClr val="4D4D4D"/>
-                </a:solidFill>
-                <a:latin typeface="Pretendard"/>
-                <a:ea typeface="Pretendard"/>
-                <a:cs typeface="Pretendard"/>
-              </a:rPr>
-              <a:t>정답</a:t>
-            </a:r>
-          </a:p>
-          <a:p>
-            <a:pPr algn="l">
-              <a:lnSpc>
-                <a:spcPct val="145000"/>
+                <a:spcPct val="130000"/>
               </a:lnSpc>
               <a:defRPr sz="1000">
                 <a:solidFill>
@@ -5306,406 +5338,25 @@
                 <a:ea typeface="Pretendard Medium"/>
                 <a:cs typeface="Pretendard Medium"/>
               </a:rPr>
-              <a:t>스테레오</a:t>
-            </a:r>
-          </a:p>
-          <a:p>
-            <a:pPr algn="l">
-              <a:lnSpc>
-                <a:spcPct val="145000"/>
-              </a:lnSpc>
-              <a:defRPr sz="1000">
-                <a:solidFill>
-                  <a:srgbClr val="4D4D4D"/>
-                </a:solidFill>
-                <a:latin typeface="Pretendard"/>
-              </a:defRPr>
-            </a:pPr>
-            <a:r>
-              <a:rPr sz="1000" b="0">
-                <a:solidFill>
-                  <a:srgbClr val="4D4D4D"/>
-                </a:solidFill>
-                <a:latin typeface="Pretendard"/>
-                <a:ea typeface="Pretendard"/>
-                <a:cs typeface="Pretendard"/>
-              </a:rPr>
-              <a:t>과제 예시</a:t>
-            </a:r>
-          </a:p>
-        </p:txBody>
-      </p:sp>
-      <p:sp>
-        <p:nvSpPr>
-          <p:cNvPr id="13" name="TextBox 12"/>
-          <p:cNvSpPr txBox="1"/>
-          <p:nvPr/>
-        </p:nvSpPr>
-        <p:spPr>
-          <a:xfrm>
-            <a:off x="2313432" y="5212080"/>
-            <a:ext cx="1143000" cy="859536"/>
-          </a:xfrm>
-          <a:prstGeom prst="rect">
-            <a:avLst/>
-          </a:prstGeom>
-          <a:noFill/>
-        </p:spPr>
-        <p:txBody>
-          <a:bodyPr wrap="none" lIns="0" rIns="0" tIns="0" bIns="0">
-            <a:spAutoFit/>
-          </a:bodyPr>
-          <a:lstStyle/>
-          <a:p>
-            <a:pPr algn="r">
-              <a:lnSpc>
-                <a:spcPct val="145000"/>
-              </a:lnSpc>
-              <a:defRPr sz="900">
-                <a:solidFill>
-                  <a:srgbClr val="8F8F8F"/>
-                </a:solidFill>
-                <a:latin typeface="Pretendard"/>
-              </a:defRPr>
-            </a:pPr>
-            <a:r>
-              <a:rPr sz="900" b="0">
-                <a:solidFill>
-                  <a:srgbClr val="8F8F8F"/>
-                </a:solidFill>
-                <a:latin typeface="Pretendard"/>
-                <a:ea typeface="Pretendard"/>
-                <a:cs typeface="Pretendard"/>
-              </a:rPr>
-              <a:t>깊이 폭</a:t>
-            </a:r>
-          </a:p>
-          <a:p>
-            <a:pPr algn="r">
-              <a:lnSpc>
-                <a:spcPct val="145000"/>
-              </a:lnSpc>
-              <a:defRPr sz="1000">
-                <a:solidFill>
-                  <a:srgbClr val="4D4D4D"/>
-                </a:solidFill>
-                <a:latin typeface="Pretendard"/>
-              </a:defRPr>
-            </a:pPr>
-            <a:r>
-              <a:rPr sz="1000" b="0">
-                <a:solidFill>
-                  <a:srgbClr val="4D4D4D"/>
-                </a:solidFill>
-                <a:latin typeface="Pretendard"/>
-                <a:ea typeface="Pretendard"/>
-                <a:cs typeface="Pretendard"/>
-              </a:rPr>
-              <a:t>0.898 m</a:t>
-            </a:r>
-          </a:p>
-          <a:p>
-            <a:pPr algn="r">
-              <a:lnSpc>
-                <a:spcPct val="145000"/>
-              </a:lnSpc>
-              <a:defRPr sz="1000">
-                <a:solidFill>
-                  <a:srgbClr val="171717"/>
-                </a:solidFill>
-                <a:latin typeface="Pretendard Medium"/>
-              </a:defRPr>
-            </a:pPr>
-            <a:r>
-              <a:rPr sz="1000" b="0">
-                <a:solidFill>
-                  <a:srgbClr val="171717"/>
-                </a:solidFill>
-                <a:latin typeface="Pretendard Medium"/>
-                <a:ea typeface="Pretendard Medium"/>
-                <a:cs typeface="Pretendard Medium"/>
-              </a:rPr>
-              <a:t>0.915 m</a:t>
-            </a:r>
-          </a:p>
-          <a:p>
-            <a:pPr algn="r">
-              <a:lnSpc>
-                <a:spcPct val="145000"/>
-              </a:lnSpc>
-              <a:defRPr sz="1000">
-                <a:solidFill>
-                  <a:srgbClr val="4D4D4D"/>
-                </a:solidFill>
-                <a:latin typeface="Pretendard"/>
-              </a:defRPr>
-            </a:pPr>
-            <a:r>
-              <a:rPr sz="1000" b="0">
-                <a:solidFill>
-                  <a:srgbClr val="4D4D4D"/>
-                </a:solidFill>
-                <a:latin typeface="Pretendard"/>
-                <a:ea typeface="Pretendard"/>
-                <a:cs typeface="Pretendard"/>
-              </a:rPr>
-              <a:t>0.019 m</a:t>
-            </a:r>
-          </a:p>
-        </p:txBody>
-      </p:sp>
-      <p:sp>
-        <p:nvSpPr>
-          <p:cNvPr id="14" name="TextBox 13"/>
-          <p:cNvSpPr txBox="1"/>
-          <p:nvPr/>
-        </p:nvSpPr>
-        <p:spPr>
-          <a:xfrm>
-            <a:off x="3456432" y="5212080"/>
-            <a:ext cx="1188720" cy="859536"/>
-          </a:xfrm>
-          <a:prstGeom prst="rect">
-            <a:avLst/>
-          </a:prstGeom>
-          <a:noFill/>
-        </p:spPr>
-        <p:txBody>
-          <a:bodyPr wrap="none" lIns="0" rIns="0" tIns="0" bIns="0">
-            <a:spAutoFit/>
-          </a:bodyPr>
-          <a:lstStyle/>
-          <a:p>
-            <a:pPr algn="r">
-              <a:lnSpc>
-                <a:spcPct val="145000"/>
-              </a:lnSpc>
-              <a:defRPr sz="900">
-                <a:solidFill>
-                  <a:srgbClr val="8F8F8F"/>
-                </a:solidFill>
-                <a:latin typeface="Pretendard"/>
-              </a:defRPr>
-            </a:pPr>
-            <a:r>
-              <a:rPr sz="900" b="0">
-                <a:solidFill>
-                  <a:srgbClr val="8F8F8F"/>
-                </a:solidFill>
-                <a:latin typeface="Pretendard"/>
-                <a:ea typeface="Pretendard"/>
-                <a:cs typeface="Pretendard"/>
-              </a:rPr>
-              <a:t>오차 중앙값</a:t>
-            </a:r>
-          </a:p>
-          <a:p>
-            <a:pPr algn="r">
-              <a:lnSpc>
-                <a:spcPct val="145000"/>
-              </a:lnSpc>
-              <a:defRPr sz="1000">
-                <a:solidFill>
-                  <a:srgbClr val="4D4D4D"/>
-                </a:solidFill>
-                <a:latin typeface="Pretendard"/>
-              </a:defRPr>
-            </a:pPr>
-            <a:r>
-              <a:rPr sz="1000" b="0">
-                <a:solidFill>
-                  <a:srgbClr val="4D4D4D"/>
-                </a:solidFill>
-                <a:latin typeface="Pretendard"/>
-                <a:ea typeface="Pretendard"/>
-                <a:cs typeface="Pretendard"/>
-              </a:rPr>
-              <a:t>—</a:t>
-            </a:r>
-          </a:p>
-          <a:p>
-            <a:pPr algn="r">
-              <a:lnSpc>
-                <a:spcPct val="145000"/>
-              </a:lnSpc>
-              <a:defRPr sz="1000">
-                <a:solidFill>
-                  <a:srgbClr val="171717"/>
-                </a:solidFill>
-                <a:latin typeface="Pretendard Medium"/>
-              </a:defRPr>
-            </a:pPr>
-            <a:r>
-              <a:rPr sz="1000" b="0">
-                <a:solidFill>
-                  <a:srgbClr val="171717"/>
-                </a:solidFill>
-                <a:latin typeface="Pretendard Medium"/>
-                <a:ea typeface="Pretendard Medium"/>
-                <a:cs typeface="Pretendard Medium"/>
-              </a:rPr>
-              <a:t>1.0 cm</a:t>
-            </a:r>
-          </a:p>
-          <a:p>
-            <a:pPr algn="r">
-              <a:lnSpc>
-                <a:spcPct val="145000"/>
-              </a:lnSpc>
-              <a:defRPr sz="1000">
-                <a:solidFill>
-                  <a:srgbClr val="4D4D4D"/>
-                </a:solidFill>
-                <a:latin typeface="Pretendard"/>
-              </a:defRPr>
-            </a:pPr>
-            <a:r>
-              <a:rPr sz="1000" b="0">
-                <a:solidFill>
-                  <a:srgbClr val="4D4D4D"/>
-                </a:solidFill>
-                <a:latin typeface="Pretendard"/>
-                <a:ea typeface="Pretendard"/>
-                <a:cs typeface="Pretendard"/>
-              </a:rPr>
-              <a:t>7.2 cm</a:t>
-            </a:r>
-          </a:p>
-        </p:txBody>
-      </p:sp>
-      <p:sp>
-        <p:nvSpPr>
-          <p:cNvPr id="15" name="TextBox 14"/>
-          <p:cNvSpPr txBox="1"/>
-          <p:nvPr/>
-        </p:nvSpPr>
-        <p:spPr>
-          <a:xfrm>
-            <a:off x="4645152" y="5212080"/>
-            <a:ext cx="960120" cy="859536"/>
-          </a:xfrm>
-          <a:prstGeom prst="rect">
-            <a:avLst/>
-          </a:prstGeom>
-          <a:noFill/>
-        </p:spPr>
-        <p:txBody>
-          <a:bodyPr wrap="none" lIns="0" rIns="0" tIns="0" bIns="0">
-            <a:spAutoFit/>
-          </a:bodyPr>
-          <a:lstStyle/>
-          <a:p>
-            <a:pPr algn="r">
-              <a:lnSpc>
-                <a:spcPct val="145000"/>
-              </a:lnSpc>
-              <a:defRPr sz="900">
-                <a:solidFill>
-                  <a:srgbClr val="8F8F8F"/>
-                </a:solidFill>
-                <a:latin typeface="Pretendard"/>
-              </a:defRPr>
-            </a:pPr>
-            <a:r>
-              <a:rPr sz="900" b="0">
-                <a:solidFill>
-                  <a:srgbClr val="8F8F8F"/>
-                </a:solidFill>
-                <a:latin typeface="Pretendard"/>
-                <a:ea typeface="Pretendard"/>
-                <a:cs typeface="Pretendard"/>
-              </a:rPr>
-              <a:t>5cm 이내</a:t>
-            </a:r>
-          </a:p>
-          <a:p>
-            <a:pPr algn="r">
-              <a:lnSpc>
-                <a:spcPct val="145000"/>
-              </a:lnSpc>
-              <a:defRPr sz="1000">
-                <a:solidFill>
-                  <a:srgbClr val="4D4D4D"/>
-                </a:solidFill>
-                <a:latin typeface="Pretendard"/>
-              </a:defRPr>
-            </a:pPr>
-            <a:r>
-              <a:rPr sz="1000" b="0">
-                <a:solidFill>
-                  <a:srgbClr val="4D4D4D"/>
-                </a:solidFill>
-                <a:latin typeface="Pretendard"/>
-                <a:ea typeface="Pretendard"/>
-                <a:cs typeface="Pretendard"/>
-              </a:rPr>
-              <a:t>—</a:t>
-            </a:r>
-          </a:p>
-          <a:p>
-            <a:pPr algn="r">
-              <a:lnSpc>
-                <a:spcPct val="145000"/>
-              </a:lnSpc>
-              <a:defRPr sz="1000">
-                <a:solidFill>
-                  <a:srgbClr val="171717"/>
-                </a:solidFill>
-                <a:latin typeface="Pretendard Medium"/>
-              </a:defRPr>
-            </a:pPr>
-            <a:r>
-              <a:rPr sz="1000" b="0">
-                <a:solidFill>
-                  <a:srgbClr val="171717"/>
-                </a:solidFill>
-                <a:latin typeface="Pretendard Medium"/>
-                <a:ea typeface="Pretendard Medium"/>
-                <a:cs typeface="Pretendard Medium"/>
-              </a:rPr>
-              <a:t>96.1%</a:t>
-            </a:r>
-          </a:p>
-          <a:p>
-            <a:pPr algn="r">
-              <a:lnSpc>
-                <a:spcPct val="145000"/>
-              </a:lnSpc>
-              <a:defRPr sz="1000">
-                <a:solidFill>
-                  <a:srgbClr val="4D4D4D"/>
-                </a:solidFill>
-                <a:latin typeface="Pretendard"/>
-              </a:defRPr>
-            </a:pPr>
-            <a:r>
-              <a:rPr sz="1000" b="0">
-                <a:solidFill>
-                  <a:srgbClr val="4D4D4D"/>
-                </a:solidFill>
-                <a:latin typeface="Pretendard"/>
-                <a:ea typeface="Pretendard"/>
-                <a:cs typeface="Pretendard"/>
-              </a:rPr>
-              <a:t>32.8%</a:t>
-            </a:r>
-          </a:p>
-        </p:txBody>
-      </p:sp>
-      <p:sp>
-        <p:nvSpPr>
-          <p:cNvPr id="16" name="Rounded Rectangle 15"/>
+              <a:t>정답 깊이 폭 0.898 m → 스테레오 0.915 m / 과제 예시 0.019 m</a:t>
+            </a:r>
+          </a:p>
+        </p:txBody>
+      </p:sp>
+      <p:sp>
+        <p:nvSpPr>
+          <p:cNvPr id="12" name="Rounded Rectangle 11"/>
           <p:cNvSpPr/>
           <p:nvPr/>
         </p:nvSpPr>
         <p:spPr>
           <a:xfrm>
-            <a:off x="6364224" y="4370832"/>
-            <a:ext cx="5166360" cy="1892807"/>
+            <a:off x="6364224" y="4590288"/>
+            <a:ext cx="5166360" cy="1700784"/>
           </a:xfrm>
           <a:prstGeom prst="roundRect">
             <a:avLst>
-              <a:gd name="adj" fmla="val 6038"/>
+              <a:gd name="adj" fmla="val 6720"/>
             </a:avLst>
           </a:prstGeom>
           <a:solidFill>
@@ -5742,13 +5393,13 @@
       </p:sp>
       <p:sp>
         <p:nvSpPr>
-          <p:cNvPr id="17" name="TextBox 16"/>
+          <p:cNvPr id="13" name="TextBox 12"/>
           <p:cNvSpPr txBox="1"/>
           <p:nvPr/>
         </p:nvSpPr>
         <p:spPr>
           <a:xfrm>
-            <a:off x="6601968" y="4544568"/>
+            <a:off x="6601968" y="4764024"/>
             <a:ext cx="4690872" cy="219456"/>
           </a:xfrm>
           <a:prstGeom prst="rect">
@@ -5782,21 +5433,21 @@
                 <a:ea typeface="Pretendard SemiBold"/>
                 <a:cs typeface="Pretendard SemiBold"/>
               </a:rPr>
-              <a:t>Unit Test 72개로 수식을 검증</a:t>
-            </a:r>
-          </a:p>
-        </p:txBody>
-      </p:sp>
-      <p:sp>
-        <p:nvSpPr>
-          <p:cNvPr id="18" name="TextBox 17"/>
+              <a:t>72개를 다섯 갈래로</a:t>
+            </a:r>
+          </a:p>
+        </p:txBody>
+      </p:sp>
+      <p:sp>
+        <p:nvSpPr>
+          <p:cNvPr id="14" name="TextBox 13"/>
           <p:cNvSpPr txBox="1"/>
           <p:nvPr/>
         </p:nvSpPr>
         <p:spPr>
           <a:xfrm>
-            <a:off x="6601968" y="4791456"/>
-            <a:ext cx="4690872" cy="1289303"/>
+            <a:off x="6601968" y="5010912"/>
+            <a:ext cx="4690872" cy="1097280"/>
           </a:xfrm>
           <a:prstGeom prst="rect">
             <a:avLst/>
@@ -5829,7 +5480,7 @@
                 <a:ea typeface="Pretendard"/>
                 <a:cs typeface="Pretendard"/>
               </a:rPr>
-              <a:t>출력 크기와 자료형만 보면 수식이 틀려도 통과합니다.</a:t>
+              <a:t>해석해 — Z = f·B/d 를 1e-12 까지 대조</a:t>
             </a:r>
           </a:p>
           <a:p>
@@ -5853,31 +5504,7 @@
                 <a:ea typeface="Pretendard"/>
                 <a:cs typeface="Pretendard"/>
               </a:rPr>
-              <a:t>손으로 풀 수 있는 조건을 만들어 수치까지 확인했습니다.</a:t>
-            </a:r>
-          </a:p>
-          <a:p>
-            <a:pPr algn="l">
-              <a:lnSpc>
-                <a:spcPct val="130000"/>
-              </a:lnSpc>
-              <a:defRPr sz="400">
-                <a:solidFill>
-                  <a:srgbClr val="4D4D4D"/>
-                </a:solidFill>
-                <a:latin typeface="Pretendard"/>
-              </a:defRPr>
-            </a:pPr>
-            <a:r>
-              <a:rPr sz="400" b="0">
-                <a:solidFill>
-                  <a:srgbClr val="4D4D4D"/>
-                </a:solidFill>
-                <a:latin typeface="Pretendard"/>
-                <a:ea typeface="Pretendard"/>
-                <a:cs typeface="Pretendard"/>
-              </a:rPr>
-              <a:t/>
+              <a:t>불변식 — B와 d를 함께 2배 하면 Z 는 그대로</a:t>
             </a:r>
           </a:p>
           <a:p>
@@ -5887,21 +5514,21 @@
               </a:lnSpc>
               <a:defRPr sz="1000">
                 <a:solidFill>
-                  <a:srgbClr val="171717"/>
-                </a:solidFill>
-                <a:latin typeface="Pretendard Medium"/>
+                  <a:srgbClr val="4D4D4D"/>
+                </a:solidFill>
+                <a:latin typeface="Pretendard"/>
               </a:defRPr>
             </a:pPr>
             <a:r>
               <a:rPr sz="1000" b="0">
                 <a:solidFill>
-                  <a:srgbClr val="171717"/>
-                </a:solidFill>
-                <a:latin typeface="Pretendard Medium"/>
-                <a:ea typeface="Pretendard Medium"/>
-                <a:cs typeface="Pretendard Medium"/>
+                  <a:srgbClr val="4D4D4D"/>
+                </a:solidFill>
+                <a:latin typeface="Pretendard"/>
+                <a:ea typeface="Pretendard"/>
+                <a:cs typeface="Pretendard"/>
               </a:rPr>
-              <a:t>해석해 — Z = f·B/d 를 1e-12 까지 대조</a:t>
+              <a:t>실패 특성화 — 같은 거리라도 반사율이 다르면 4배 다른 깊이</a:t>
             </a:r>
           </a:p>
           <a:p>
@@ -5911,21 +5538,21 @@
               </a:lnSpc>
               <a:defRPr sz="1000">
                 <a:solidFill>
-                  <a:srgbClr val="171717"/>
-                </a:solidFill>
-                <a:latin typeface="Pretendard Medium"/>
+                  <a:srgbClr val="4D4D4D"/>
+                </a:solidFill>
+                <a:latin typeface="Pretendard"/>
               </a:defRPr>
             </a:pPr>
             <a:r>
               <a:rPr sz="1000" b="0">
                 <a:solidFill>
-                  <a:srgbClr val="171717"/>
-                </a:solidFill>
-                <a:latin typeface="Pretendard Medium"/>
-                <a:ea typeface="Pretendard Medium"/>
-                <a:cs typeface="Pretendard Medium"/>
+                  <a:srgbClr val="4D4D4D"/>
+                </a:solidFill>
+                <a:latin typeface="Pretendard"/>
+                <a:ea typeface="Pretendard"/>
+                <a:cs typeface="Pretendard"/>
               </a:rPr>
-              <a:t>불변식 — B와 d를 함께 2배 하면 Z 는 그대로</a:t>
+              <a:t>경계 조건 — 시차 0(무한원점), None 입력, 크기 불일치</a:t>
             </a:r>
           </a:p>
           <a:p>
@@ -5949,31 +5576,7 @@
                 <a:ea typeface="Pretendard Medium"/>
                 <a:cs typeface="Pretendard Medium"/>
               </a:rPr>
-              <a:t>실패 특성화 — 같은 거리라도 반사율이 다르면 4배 다른 깊이</a:t>
-            </a:r>
-          </a:p>
-          <a:p>
-            <a:pPr algn="l">
-              <a:lnSpc>
-                <a:spcPct val="130000"/>
-              </a:lnSpc>
-              <a:defRPr sz="1000">
-                <a:solidFill>
-                  <a:srgbClr val="4D4D4D"/>
-                </a:solidFill>
-                <a:latin typeface="Pretendard"/>
-              </a:defRPr>
-            </a:pPr>
-            <a:r>
-              <a:rPr sz="1000" b="0">
-                <a:solidFill>
-                  <a:srgbClr val="4D4D4D"/>
-                </a:solidFill>
-                <a:latin typeface="Pretendard"/>
-                <a:ea typeface="Pretendard"/>
-                <a:cs typeface="Pretendard"/>
-              </a:rPr>
-              <a:t>경계 조건 — 시차 0(무한원점), None 입력, 크기 불일치</a:t>
+              <a:t>회귀 — 실제로 찾은 버그를 다시 나지 않게 고정</a:t>
             </a:r>
           </a:p>
         </p:txBody>
@@ -6082,7 +5685,7 @@
                 <a:ea typeface="Cascadia Mono"/>
                 <a:cs typeface="Cascadia Mono"/>
               </a:rPr>
-              <a:t>03 / 결과와 한계</a:t>
+              <a:t>03 / 2D → 3D 변환 결과</a:t>
             </a:r>
           </a:p>
         </p:txBody>
@@ -6121,7 +5724,7 @@
               </a:defRPr>
             </a:pPr>
             <a:r>
-              <a:rPr sz="2700" b="0">
+              <a:rPr sz="2700" b="0" spc="-108">
                 <a:solidFill>
                   <a:srgbClr val="171717"/>
                 </a:solidFill>
@@ -6176,7 +5779,7 @@
                 <a:ea typeface="Pretendard"/>
                 <a:cs typeface="Pretendard"/>
               </a:rPr>
-              <a:t>기준 깊이 = 동봉 메시 40만 점을 z-buffer 로 투영 · 대조군에는 정답에 맞춘 최적 정렬을 적용해 유리한 조건을 부여 · 스테레오가 값을 낸 60% 화소에서 둘 다 채점</a:t>
+              <a:t>깊이 맵을 역투영해 5,711점의 포인트 클라우드로 · 대조군에는 정답에 맞춘 최적 정렬을 적용하고 같은 5,711개 화소에서 채점</a:t>
             </a:r>
           </a:p>
         </p:txBody>
@@ -6223,7 +5826,7 @@
                 <a:ea typeface="Cascadia Mono"/>
                 <a:cs typeface="Cascadia Mono"/>
               </a:rPr>
-              <a:t>03 / 03</a:t>
+              <a:t>03 / 04</a:t>
             </a:r>
           </a:p>
         </p:txBody>
@@ -6236,12 +5839,12 @@
         </p:nvSpPr>
         <p:spPr>
           <a:xfrm>
-            <a:off x="658368" y="1627632"/>
-            <a:ext cx="10872216" cy="2331720"/>
+            <a:off x="658368" y="1554480"/>
+            <a:ext cx="10872216" cy="2889504"/>
           </a:xfrm>
           <a:prstGeom prst="roundRect">
             <a:avLst>
-              <a:gd name="adj" fmla="val 4901"/>
+              <a:gd name="adj" fmla="val 3955"/>
             </a:avLst>
           </a:prstGeom>
           <a:solidFill>
@@ -6278,7 +5881,7 @@
       </p:sp>
       <p:pic>
         <p:nvPicPr>
-          <p:cNvPr id="8" name="Picture 7" descr="03_spe3r_stereo_slide.png"/>
+          <p:cNvPr id="8" name="Picture 7" descr="04_pointclouds.png"/>
           <p:cNvPicPr>
             <a:picLocks noChangeAspect="1"/>
           </p:cNvPicPr>
@@ -6292,8 +5895,8 @@
         </p:blipFill>
         <p:spPr>
           <a:xfrm>
-            <a:off x="3245768" y="1764792"/>
-            <a:ext cx="5697415" cy="2057400"/>
+            <a:off x="2211323" y="1691639"/>
+            <a:ext cx="7766304" cy="2615184"/>
           </a:xfrm>
           <a:prstGeom prst="rect">
             <a:avLst/>
@@ -6308,12 +5911,12 @@
         </p:nvSpPr>
         <p:spPr>
           <a:xfrm>
-            <a:off x="658368" y="4169663"/>
-            <a:ext cx="6053328" cy="2093976"/>
+            <a:off x="658368" y="4590288"/>
+            <a:ext cx="5358384" cy="1700784"/>
           </a:xfrm>
           <a:prstGeom prst="roundRect">
             <a:avLst>
-              <a:gd name="adj" fmla="val 5458"/>
+              <a:gd name="adj" fmla="val 6720"/>
             </a:avLst>
           </a:prstGeom>
           <a:solidFill>
@@ -6356,8 +5959,8 @@
         </p:nvSpPr>
         <p:spPr>
           <a:xfrm>
-            <a:off x="896112" y="4343400"/>
-            <a:ext cx="5577840" cy="219456"/>
+            <a:off x="896112" y="4764024"/>
+            <a:ext cx="4882896" cy="219456"/>
           </a:xfrm>
           <a:prstGeom prst="rect">
             <a:avLst/>
@@ -6390,7 +5993,7 @@
                 <a:ea typeface="Pretendard SemiBold"/>
                 <a:cs typeface="Pretendard SemiBold"/>
               </a:rPr>
-              <a:t>결과</a:t>
+              <a:t>깊이 정확도</a:t>
             </a:r>
           </a:p>
         </p:txBody>
@@ -6403,8 +6006,8 @@
         </p:nvSpPr>
         <p:spPr>
           <a:xfrm>
-            <a:off x="896112" y="4617720"/>
-            <a:ext cx="1417320" cy="644652"/>
+            <a:off x="896112" y="5038344"/>
+            <a:ext cx="1325880" cy="644652"/>
           </a:xfrm>
           <a:prstGeom prst="rect">
             <a:avLst/>
@@ -6498,8 +6101,8 @@
         </p:nvSpPr>
         <p:spPr>
           <a:xfrm>
-            <a:off x="2313432" y="4617720"/>
-            <a:ext cx="1280160" cy="644652"/>
+            <a:off x="2221991" y="5038344"/>
+            <a:ext cx="1188720" cy="644652"/>
           </a:xfrm>
           <a:prstGeom prst="rect">
             <a:avLst/>
@@ -6593,8 +6196,8 @@
         </p:nvSpPr>
         <p:spPr>
           <a:xfrm>
-            <a:off x="3593592" y="4617720"/>
-            <a:ext cx="1280160" cy="644652"/>
+            <a:off x="3410712" y="5038344"/>
+            <a:ext cx="1188720" cy="644652"/>
           </a:xfrm>
           <a:prstGeom prst="rect">
             <a:avLst/>
@@ -6688,8 +6291,8 @@
         </p:nvSpPr>
         <p:spPr>
           <a:xfrm>
-            <a:off x="4873752" y="4617720"/>
-            <a:ext cx="1051560" cy="644652"/>
+            <a:off x="4599431" y="5038344"/>
+            <a:ext cx="960120" cy="644652"/>
           </a:xfrm>
           <a:prstGeom prst="rect">
             <a:avLst/>
@@ -6777,161 +6380,18 @@
       </p:sp>
       <p:sp>
         <p:nvSpPr>
-          <p:cNvPr id="15" name="TextBox 14"/>
-          <p:cNvSpPr txBox="1"/>
-          <p:nvPr/>
-        </p:nvSpPr>
-        <p:spPr>
-          <a:xfrm>
-            <a:off x="896112" y="5349240"/>
-            <a:ext cx="5577840" cy="841248"/>
-          </a:xfrm>
-          <a:prstGeom prst="rect">
-            <a:avLst/>
-          </a:prstGeom>
-          <a:noFill/>
-        </p:spPr>
-        <p:txBody>
-          <a:bodyPr wrap="square" lIns="0" rIns="0" tIns="0" bIns="0">
-            <a:spAutoFit/>
-          </a:bodyPr>
-          <a:lstStyle/>
-          <a:p>
-            <a:pPr algn="l">
-              <a:lnSpc>
-                <a:spcPct val="130000"/>
-              </a:lnSpc>
-              <a:defRPr sz="1000">
-                <a:solidFill>
-                  <a:srgbClr val="171717"/>
-                </a:solidFill>
-                <a:latin typeface="Pretendard Medium"/>
-              </a:defRPr>
-            </a:pPr>
-            <a:r>
-              <a:rPr sz="1000" b="0">
-                <a:solidFill>
-                  <a:srgbClr val="171717"/>
-                </a:solidFill>
-                <a:latin typeface="Pretendard Medium"/>
-                <a:ea typeface="Pretendard Medium"/>
-                <a:cs typeface="Pretendard Medium"/>
-              </a:rPr>
-              <a:t>포인트 클라우드 5,711점 · 메시 대비 Chamfer 0.0128  →</a:t>
-            </a:r>
-          </a:p>
-          <a:p>
-            <a:pPr algn="l">
-              <a:lnSpc>
-                <a:spcPct val="130000"/>
-              </a:lnSpc>
-              <a:defRPr sz="400">
-                <a:solidFill>
-                  <a:srgbClr val="4D4D4D"/>
-                </a:solidFill>
-                <a:latin typeface="Pretendard"/>
-              </a:defRPr>
-            </a:pPr>
-            <a:r>
-              <a:rPr sz="400" b="0">
-                <a:solidFill>
-                  <a:srgbClr val="4D4D4D"/>
-                </a:solidFill>
-                <a:latin typeface="Pretendard"/>
-                <a:ea typeface="Pretendard"/>
-                <a:cs typeface="Pretendard"/>
-              </a:rPr>
-              <a:t/>
-            </a:r>
-          </a:p>
-          <a:p>
-            <a:pPr algn="l">
-              <a:lnSpc>
-                <a:spcPct val="130000"/>
-              </a:lnSpc>
-              <a:defRPr sz="1000">
-                <a:solidFill>
-                  <a:srgbClr val="4D4D4D"/>
-                </a:solidFill>
-                <a:latin typeface="Pretendard"/>
-              </a:defRPr>
-            </a:pPr>
-            <a:r>
-              <a:rPr sz="1000" b="0">
-                <a:solidFill>
-                  <a:srgbClr val="4D4D4D"/>
-                </a:solidFill>
-                <a:latin typeface="Pretendard"/>
-                <a:ea typeface="Pretendard"/>
-                <a:cs typeface="Pretendard"/>
-              </a:rPr>
-              <a:t>세로 쌍 unrotate 누락 버그를 찾아 고쳐 쓸 만한 쌍이 3 → 5개 (후보 20쌍 중 10쌍이 세로였습니다)</a:t>
-            </a:r>
-          </a:p>
-          <a:p>
-            <a:pPr algn="l">
-              <a:lnSpc>
-                <a:spcPct val="130000"/>
-              </a:lnSpc>
-              <a:defRPr sz="1000">
-                <a:solidFill>
-                  <a:srgbClr val="4D4D4D"/>
-                </a:solidFill>
-                <a:latin typeface="Pretendard"/>
-              </a:defRPr>
-            </a:pPr>
-            <a:r>
-              <a:rPr sz="1000" b="0">
-                <a:solidFill>
-                  <a:srgbClr val="4D4D4D"/>
-                </a:solidFill>
-                <a:latin typeface="Pretendard"/>
-                <a:ea typeface="Pretendard"/>
-                <a:cs typeface="Pretendard"/>
-              </a:rPr>
-              <a:t>한계 — 유효화소 60%, 단일 시점이라 뒷면은 복원 불가(Chamfer GT→pred 0.029),</a:t>
-            </a:r>
-          </a:p>
-          <a:p>
-            <a:pPr algn="l">
-              <a:lnSpc>
-                <a:spcPct val="130000"/>
-              </a:lnSpc>
-              <a:defRPr sz="1000">
-                <a:solidFill>
-                  <a:srgbClr val="4D4D4D"/>
-                </a:solidFill>
-                <a:latin typeface="Pretendard"/>
-              </a:defRPr>
-            </a:pPr>
-            <a:r>
-              <a:rPr sz="1000" b="0">
-                <a:solidFill>
-                  <a:srgbClr val="4D4D4D"/>
-                </a:solidFill>
-                <a:latin typeface="Pretendard"/>
-                <a:ea typeface="Pretendard"/>
-                <a:cs typeface="Pretendard"/>
-              </a:rPr>
-              <a:t>정답 자세를 그대로 사용, 깊이 분해능 하한 6.8 cm/px (dZ = Z²/fB)</a:t>
-            </a:r>
-          </a:p>
-        </p:txBody>
-      </p:sp>
-      <p:sp>
-        <p:nvSpPr>
-          <p:cNvPr id="16" name="Rounded Rectangle 15"/>
+          <p:cNvPr id="15" name="Rounded Rectangle 14"/>
           <p:cNvSpPr/>
           <p:nvPr/>
         </p:nvSpPr>
         <p:spPr>
           <a:xfrm>
-            <a:off x="6931152" y="4169663"/>
-            <a:ext cx="4599432" cy="2093976"/>
+            <a:off x="6364224" y="4590288"/>
+            <a:ext cx="5166360" cy="1700784"/>
           </a:xfrm>
           <a:prstGeom prst="roundRect">
             <a:avLst>
-              <a:gd name="adj" fmla="val 5458"/>
+              <a:gd name="adj" fmla="val 6720"/>
             </a:avLst>
           </a:prstGeom>
           <a:solidFill>
@@ -6966,30 +6426,1136 @@
           </a:p>
         </p:txBody>
       </p:sp>
+      <p:sp>
+        <p:nvSpPr>
+          <p:cNvPr id="16" name="TextBox 15"/>
+          <p:cNvSpPr txBox="1"/>
+          <p:nvPr/>
+        </p:nvSpPr>
+        <p:spPr>
+          <a:xfrm>
+            <a:off x="6601968" y="4764024"/>
+            <a:ext cx="4690872" cy="219456"/>
+          </a:xfrm>
+          <a:prstGeom prst="rect">
+            <a:avLst/>
+          </a:prstGeom>
+          <a:noFill/>
+        </p:spPr>
+        <p:txBody>
+          <a:bodyPr wrap="square" lIns="0" rIns="0" tIns="0" bIns="0">
+            <a:spAutoFit/>
+          </a:bodyPr>
+          <a:lstStyle/>
+          <a:p>
+            <a:pPr algn="l">
+              <a:lnSpc>
+                <a:spcPct val="135000"/>
+              </a:lnSpc>
+              <a:defRPr sz="1050">
+                <a:solidFill>
+                  <a:srgbClr val="171717"/>
+                </a:solidFill>
+                <a:latin typeface="Pretendard SemiBold"/>
+              </a:defRPr>
+            </a:pPr>
+            <a:r>
+              <a:rPr sz="1050" b="0">
+                <a:solidFill>
+                  <a:srgbClr val="171717"/>
+                </a:solidFill>
+                <a:latin typeface="Pretendard SemiBold"/>
+                <a:ea typeface="Pretendard SemiBold"/>
+                <a:cs typeface="Pretendard SemiBold"/>
+              </a:rPr>
+              <a:t>세 축이 전부 미터입니다</a:t>
+            </a:r>
+          </a:p>
+        </p:txBody>
+      </p:sp>
+      <p:sp>
+        <p:nvSpPr>
+          <p:cNvPr id="17" name="TextBox 16"/>
+          <p:cNvSpPr txBox="1"/>
+          <p:nvPr/>
+        </p:nvSpPr>
+        <p:spPr>
+          <a:xfrm>
+            <a:off x="6601968" y="5010912"/>
+            <a:ext cx="4690872" cy="1097280"/>
+          </a:xfrm>
+          <a:prstGeom prst="rect">
+            <a:avLst/>
+          </a:prstGeom>
+          <a:noFill/>
+        </p:spPr>
+        <p:txBody>
+          <a:bodyPr wrap="square" lIns="0" rIns="0" tIns="0" bIns="0">
+            <a:spAutoFit/>
+          </a:bodyPr>
+          <a:lstStyle/>
+          <a:p>
+            <a:pPr algn="l">
+              <a:lnSpc>
+                <a:spcPct val="130000"/>
+              </a:lnSpc>
+              <a:defRPr sz="1000">
+                <a:solidFill>
+                  <a:srgbClr val="4D4D4D"/>
+                </a:solidFill>
+                <a:latin typeface="Pretendard"/>
+              </a:defRPr>
+            </a:pPr>
+            <a:r>
+              <a:rPr sz="1000" b="0">
+                <a:solidFill>
+                  <a:srgbClr val="4D4D4D"/>
+                </a:solidFill>
+                <a:latin typeface="Pretendard"/>
+                <a:ea typeface="Pretendard"/>
+                <a:cs typeface="Pretendard"/>
+              </a:rPr>
+              <a:t>과제 예시 코드는 X, Y 가 픽셀 인덱스이고 Z 가 밝기라</a:t>
+            </a:r>
+          </a:p>
+          <a:p>
+            <a:pPr algn="l">
+              <a:lnSpc>
+                <a:spcPct val="130000"/>
+              </a:lnSpc>
+              <a:defRPr sz="1000">
+                <a:solidFill>
+                  <a:srgbClr val="4D4D4D"/>
+                </a:solidFill>
+                <a:latin typeface="Pretendard"/>
+              </a:defRPr>
+            </a:pPr>
+            <a:r>
+              <a:rPr sz="1000" b="0">
+                <a:solidFill>
+                  <a:srgbClr val="4D4D4D"/>
+                </a:solidFill>
+                <a:latin typeface="Pretendard"/>
+                <a:ea typeface="Pretendard"/>
+                <a:cs typeface="Pretendard"/>
+              </a:rPr>
+              <a:t>단위가 서로 다릅니다. 맨 오른쪽이 그것입니다.</a:t>
+            </a:r>
+          </a:p>
+          <a:p>
+            <a:pPr algn="l">
+              <a:lnSpc>
+                <a:spcPct val="130000"/>
+              </a:lnSpc>
+              <a:defRPr sz="400">
+                <a:solidFill>
+                  <a:srgbClr val="4D4D4D"/>
+                </a:solidFill>
+                <a:latin typeface="Pretendard"/>
+              </a:defRPr>
+            </a:pPr>
+            <a:r>
+              <a:rPr sz="400" b="0">
+                <a:solidFill>
+                  <a:srgbClr val="4D4D4D"/>
+                </a:solidFill>
+                <a:latin typeface="Pretendard"/>
+                <a:ea typeface="Pretendard"/>
+                <a:cs typeface="Pretendard"/>
+              </a:rPr>
+              <a:t/>
+            </a:r>
+          </a:p>
+          <a:p>
+            <a:pPr algn="l">
+              <a:lnSpc>
+                <a:spcPct val="130000"/>
+              </a:lnSpc>
+              <a:defRPr sz="1000">
+                <a:solidFill>
+                  <a:srgbClr val="171717"/>
+                </a:solidFill>
+                <a:latin typeface="Pretendard Medium"/>
+              </a:defRPr>
+            </a:pPr>
+            <a:r>
+              <a:rPr sz="1000" b="0">
+                <a:solidFill>
+                  <a:srgbClr val="171717"/>
+                </a:solidFill>
+                <a:latin typeface="Pretendard Medium"/>
+                <a:ea typeface="Pretendard Medium"/>
+                <a:cs typeface="Pretendard Medium"/>
+              </a:rPr>
+              <a:t>Chamfer  pred→GT 0.0128  ·  GT→pred 0.0293</a:t>
+            </a:r>
+          </a:p>
+          <a:p>
+            <a:pPr algn="l">
+              <a:lnSpc>
+                <a:spcPct val="130000"/>
+              </a:lnSpc>
+              <a:defRPr sz="1000">
+                <a:solidFill>
+                  <a:srgbClr val="4D4D4D"/>
+                </a:solidFill>
+                <a:latin typeface="Pretendard"/>
+              </a:defRPr>
+            </a:pPr>
+            <a:r>
+              <a:rPr sz="1000" b="0">
+                <a:solidFill>
+                  <a:srgbClr val="4D4D4D"/>
+                </a:solidFill>
+                <a:latin typeface="Pretendard"/>
+                <a:ea typeface="Pretendard"/>
+                <a:cs typeface="Pretendard"/>
+              </a:rPr>
+              <a:t>뒤쪽이 큰 것이 단일 시점이라 뒷면이 빈다는 한계의 크기입니다.</a:t>
+            </a:r>
+          </a:p>
+        </p:txBody>
+      </p:sp>
+    </p:spTree>
+  </p:cSld>
+  <p:clrMapOvr>
+    <a:masterClrMapping/>
+  </p:clrMapOvr>
+</p:sld>
+</file>
+
+<file path=ppt/slides/slide4.xml><?xml version="1.0" encoding="utf-8"?>
+<p:sld xmlns:a="http://schemas.openxmlformats.org/drawingml/2006/main" xmlns:p="http://schemas.openxmlformats.org/presentationml/2006/main" xmlns:r="http://schemas.openxmlformats.org/officeDocument/2006/relationships">
+  <p:cSld>
+    <p:spTree>
+      <p:nvGrpSpPr>
+        <p:cNvPr id="1" name=""/>
+        <p:cNvGrpSpPr/>
+        <p:nvPr/>
+      </p:nvGrpSpPr>
+      <p:grpSpPr/>
+      <p:sp>
+        <p:nvSpPr>
+          <p:cNvPr id="2" name="Rectangle 1"/>
+          <p:cNvSpPr/>
+          <p:nvPr/>
+        </p:nvSpPr>
+        <p:spPr>
+          <a:xfrm>
+            <a:off x="0" y="0"/>
+            <a:ext cx="12191695" cy="6858000"/>
+          </a:xfrm>
+          <a:prstGeom prst="rect">
+            <a:avLst/>
+          </a:prstGeom>
+          <a:solidFill>
+            <a:srgbClr val="FAFAFA"/>
+          </a:solidFill>
+          <a:ln>
+            <a:noFill/>
+          </a:ln>
+          <a:effectLst/>
+        </p:spPr>
+        <p:style>
+          <a:lnRef idx="1">
+            <a:schemeClr val="accent1"/>
+          </a:lnRef>
+          <a:fillRef idx="3">
+            <a:schemeClr val="accent1"/>
+          </a:fillRef>
+          <a:effectRef idx="2">
+            <a:schemeClr val="accent1"/>
+          </a:effectRef>
+          <a:fontRef idx="minor">
+            <a:schemeClr val="lt1"/>
+          </a:fontRef>
+        </p:style>
+        <p:txBody>
+          <a:bodyPr rtlCol="0" anchor="ctr"/>
+          <a:lstStyle/>
+          <a:p>
+            <a:pPr algn="ctr"/>
+          </a:p>
+        </p:txBody>
+      </p:sp>
+      <p:sp>
+        <p:nvSpPr>
+          <p:cNvPr id="3" name="TextBox 2"/>
+          <p:cNvSpPr txBox="1"/>
+          <p:nvPr/>
+        </p:nvSpPr>
+        <p:spPr>
+          <a:xfrm>
+            <a:off x="658368" y="420624"/>
+            <a:ext cx="10872216" cy="219456"/>
+          </a:xfrm>
+          <a:prstGeom prst="rect">
+            <a:avLst/>
+          </a:prstGeom>
+          <a:noFill/>
+        </p:spPr>
+        <p:txBody>
+          <a:bodyPr wrap="square" lIns="0" rIns="0" tIns="0" bIns="0">
+            <a:spAutoFit/>
+          </a:bodyPr>
+          <a:lstStyle/>
+          <a:p>
+            <a:pPr algn="l">
+              <a:lnSpc>
+                <a:spcPct val="135000"/>
+              </a:lnSpc>
+              <a:defRPr sz="850">
+                <a:solidFill>
+                  <a:srgbClr val="8F8F8F"/>
+                </a:solidFill>
+                <a:latin typeface="Cascadia Mono"/>
+              </a:defRPr>
+            </a:pPr>
+            <a:r>
+              <a:rPr sz="850" b="0">
+                <a:solidFill>
+                  <a:srgbClr val="8F8F8F"/>
+                </a:solidFill>
+                <a:latin typeface="Cascadia Mono"/>
+                <a:ea typeface="Cascadia Mono"/>
+                <a:cs typeface="Cascadia Mono"/>
+              </a:rPr>
+              <a:t>04 / 개선점</a:t>
+            </a:r>
+          </a:p>
+        </p:txBody>
+      </p:sp>
+      <p:sp>
+        <p:nvSpPr>
+          <p:cNvPr id="4" name="TextBox 3"/>
+          <p:cNvSpPr txBox="1"/>
+          <p:nvPr/>
+        </p:nvSpPr>
+        <p:spPr>
+          <a:xfrm>
+            <a:off x="658368" y="676656"/>
+            <a:ext cx="10872216" cy="475488"/>
+          </a:xfrm>
+          <a:prstGeom prst="rect">
+            <a:avLst/>
+          </a:prstGeom>
+          <a:noFill/>
+        </p:spPr>
+        <p:txBody>
+          <a:bodyPr wrap="square" lIns="0" rIns="0" tIns="0" bIns="0">
+            <a:spAutoFit/>
+          </a:bodyPr>
+          <a:lstStyle/>
+          <a:p>
+            <a:pPr algn="l">
+              <a:lnSpc>
+                <a:spcPct val="100000"/>
+              </a:lnSpc>
+              <a:defRPr sz="2700">
+                <a:solidFill>
+                  <a:srgbClr val="171717"/>
+                </a:solidFill>
+                <a:latin typeface="Pretendard SemiBold"/>
+              </a:defRPr>
+            </a:pPr>
+            <a:r>
+              <a:rPr sz="2700" b="0" spc="-108">
+                <a:solidFill>
+                  <a:srgbClr val="171717"/>
+                </a:solidFill>
+                <a:latin typeface="Pretendard SemiBold"/>
+                <a:ea typeface="Pretendard SemiBold"/>
+                <a:cs typeface="Pretendard SemiBold"/>
+              </a:rPr>
+              <a:t>유효화소 60% — 나머지는 답을 내지 못한 것입니다</a:t>
+            </a:r>
+          </a:p>
+        </p:txBody>
+      </p:sp>
+      <p:sp>
+        <p:nvSpPr>
+          <p:cNvPr id="5" name="TextBox 4"/>
+          <p:cNvSpPr txBox="1"/>
+          <p:nvPr/>
+        </p:nvSpPr>
+        <p:spPr>
+          <a:xfrm>
+            <a:off x="658368" y="1170432"/>
+            <a:ext cx="10872216" cy="237744"/>
+          </a:xfrm>
+          <a:prstGeom prst="rect">
+            <a:avLst/>
+          </a:prstGeom>
+          <a:noFill/>
+        </p:spPr>
+        <p:txBody>
+          <a:bodyPr wrap="square" lIns="0" rIns="0" tIns="0" bIns="0">
+            <a:spAutoFit/>
+          </a:bodyPr>
+          <a:lstStyle/>
+          <a:p>
+            <a:pPr algn="l">
+              <a:lnSpc>
+                <a:spcPct val="135000"/>
+              </a:lnSpc>
+              <a:defRPr sz="1050">
+                <a:solidFill>
+                  <a:srgbClr val="4D4D4D"/>
+                </a:solidFill>
+                <a:latin typeface="Pretendard"/>
+              </a:defRPr>
+            </a:pPr>
+            <a:r>
+              <a:rPr sz="1050" b="0">
+                <a:solidFill>
+                  <a:srgbClr val="4D4D4D"/>
+                </a:solidFill>
+                <a:latin typeface="Pretendard"/>
+                <a:ea typeface="Pretendard"/>
+                <a:cs typeface="Pretendard"/>
+              </a:rPr>
+              <a:t>재 본 것만 적습니다 · 수치는 outputs/metrics.json 에 그대로 남습니다</a:t>
+            </a:r>
+          </a:p>
+        </p:txBody>
+      </p:sp>
+      <p:sp>
+        <p:nvSpPr>
+          <p:cNvPr id="6" name="TextBox 5"/>
+          <p:cNvSpPr txBox="1"/>
+          <p:nvPr/>
+        </p:nvSpPr>
+        <p:spPr>
+          <a:xfrm>
+            <a:off x="10424160" y="6327648"/>
+            <a:ext cx="1106424" cy="219456"/>
+          </a:xfrm>
+          <a:prstGeom prst="rect">
+            <a:avLst/>
+          </a:prstGeom>
+          <a:noFill/>
+        </p:spPr>
+        <p:txBody>
+          <a:bodyPr wrap="square" lIns="0" rIns="0" tIns="0" bIns="0">
+            <a:spAutoFit/>
+          </a:bodyPr>
+          <a:lstStyle/>
+          <a:p>
+            <a:pPr algn="r">
+              <a:lnSpc>
+                <a:spcPct val="135000"/>
+              </a:lnSpc>
+              <a:defRPr sz="850">
+                <a:solidFill>
+                  <a:srgbClr val="A1A1A1"/>
+                </a:solidFill>
+                <a:latin typeface="Cascadia Mono"/>
+              </a:defRPr>
+            </a:pPr>
+            <a:r>
+              <a:rPr sz="850" b="0">
+                <a:solidFill>
+                  <a:srgbClr val="A1A1A1"/>
+                </a:solidFill>
+                <a:latin typeface="Cascadia Mono"/>
+                <a:ea typeface="Cascadia Mono"/>
+                <a:cs typeface="Cascadia Mono"/>
+              </a:rPr>
+              <a:t>04 / 04</a:t>
+            </a:r>
+          </a:p>
+        </p:txBody>
+      </p:sp>
+      <p:sp>
+        <p:nvSpPr>
+          <p:cNvPr id="7" name="Rounded Rectangle 6"/>
+          <p:cNvSpPr/>
+          <p:nvPr/>
+        </p:nvSpPr>
+        <p:spPr>
+          <a:xfrm>
+            <a:off x="658368" y="1554480"/>
+            <a:ext cx="10872216" cy="2889504"/>
+          </a:xfrm>
+          <a:prstGeom prst="roundRect">
+            <a:avLst>
+              <a:gd name="adj" fmla="val 3955"/>
+            </a:avLst>
+          </a:prstGeom>
+          <a:solidFill>
+            <a:srgbClr val="FFFFFF"/>
+          </a:solidFill>
+          <a:ln w="9525">
+            <a:solidFill>
+              <a:srgbClr val="EBEBEB"/>
+            </a:solidFill>
+          </a:ln>
+          <a:effectLst/>
+        </p:spPr>
+        <p:style>
+          <a:lnRef idx="1">
+            <a:schemeClr val="accent1"/>
+          </a:lnRef>
+          <a:fillRef idx="3">
+            <a:schemeClr val="accent1"/>
+          </a:fillRef>
+          <a:effectRef idx="2">
+            <a:schemeClr val="accent1"/>
+          </a:effectRef>
+          <a:fontRef idx="minor">
+            <a:schemeClr val="lt1"/>
+          </a:fontRef>
+        </p:style>
+        <p:txBody>
+          <a:bodyPr rtlCol="0" anchor="ctr"/>
+          <a:lstStyle/>
+          <a:p>
+            <a:pPr algn="ctr"/>
+          </a:p>
+        </p:txBody>
+      </p:sp>
       <p:pic>
         <p:nvPicPr>
-          <p:cNvPr id="17" name="Picture 16" descr="04_pointclouds.png"/>
+          <p:cNvPr id="8" name="Picture 7" descr="02_pair_survey.png"/>
           <p:cNvPicPr>
             <a:picLocks noChangeAspect="1"/>
           </p:cNvPicPr>
           <p:nvPr/>
         </p:nvPicPr>
         <p:blipFill>
-          <a:blip r:embed="rId3"/>
+          <a:blip r:embed="rId2"/>
           <a:stretch>
             <a:fillRect/>
           </a:stretch>
         </p:blipFill>
         <p:spPr>
           <a:xfrm>
-            <a:off x="7068312" y="4647558"/>
-            <a:ext cx="4325112" cy="1138187"/>
+            <a:off x="1517903" y="1691639"/>
+            <a:ext cx="9153144" cy="2615184"/>
           </a:xfrm>
           <a:prstGeom prst="rect">
             <a:avLst/>
           </a:prstGeom>
         </p:spPr>
       </p:pic>
+      <p:sp>
+        <p:nvSpPr>
+          <p:cNvPr id="9" name="Rounded Rectangle 8"/>
+          <p:cNvSpPr/>
+          <p:nvPr/>
+        </p:nvSpPr>
+        <p:spPr>
+          <a:xfrm>
+            <a:off x="658368" y="4590288"/>
+            <a:ext cx="5358384" cy="1700784"/>
+          </a:xfrm>
+          <a:prstGeom prst="roundRect">
+            <a:avLst>
+              <a:gd name="adj" fmla="val 6720"/>
+            </a:avLst>
+          </a:prstGeom>
+          <a:solidFill>
+            <a:srgbClr val="FFFFFF"/>
+          </a:solidFill>
+          <a:ln w="9525">
+            <a:solidFill>
+              <a:srgbClr val="EBEBEB"/>
+            </a:solidFill>
+          </a:ln>
+          <a:effectLst/>
+        </p:spPr>
+        <p:style>
+          <a:lnRef idx="1">
+            <a:schemeClr val="accent1"/>
+          </a:lnRef>
+          <a:fillRef idx="3">
+            <a:schemeClr val="accent1"/>
+          </a:fillRef>
+          <a:effectRef idx="2">
+            <a:schemeClr val="accent1"/>
+          </a:effectRef>
+          <a:fontRef idx="minor">
+            <a:schemeClr val="lt1"/>
+          </a:fontRef>
+        </p:style>
+        <p:txBody>
+          <a:bodyPr rtlCol="0" anchor="ctr"/>
+          <a:lstStyle/>
+          <a:p>
+            <a:pPr algn="ctr"/>
+          </a:p>
+        </p:txBody>
+      </p:sp>
+      <p:sp>
+        <p:nvSpPr>
+          <p:cNvPr id="10" name="TextBox 9"/>
+          <p:cNvSpPr txBox="1"/>
+          <p:nvPr/>
+        </p:nvSpPr>
+        <p:spPr>
+          <a:xfrm>
+            <a:off x="896112" y="4764024"/>
+            <a:ext cx="4882896" cy="219456"/>
+          </a:xfrm>
+          <a:prstGeom prst="rect">
+            <a:avLst/>
+          </a:prstGeom>
+          <a:noFill/>
+        </p:spPr>
+        <p:txBody>
+          <a:bodyPr wrap="square" lIns="0" rIns="0" tIns="0" bIns="0">
+            <a:spAutoFit/>
+          </a:bodyPr>
+          <a:lstStyle/>
+          <a:p>
+            <a:pPr algn="l">
+              <a:lnSpc>
+                <a:spcPct val="135000"/>
+              </a:lnSpc>
+              <a:defRPr sz="1050">
+                <a:solidFill>
+                  <a:srgbClr val="171717"/>
+                </a:solidFill>
+                <a:latin typeface="Pretendard SemiBold"/>
+              </a:defRPr>
+            </a:pPr>
+            <a:r>
+              <a:rPr sz="1050" b="0">
+                <a:solidFill>
+                  <a:srgbClr val="171717"/>
+                </a:solidFill>
+                <a:latin typeface="Pretendard SemiBold"/>
+                <a:ea typeface="Pretendard SemiBold"/>
+                <a:cs typeface="Pretendard SemiBold"/>
+              </a:rPr>
+              <a:t>시차 탐색 범위를 좁히면 (최적 쌍)</a:t>
+            </a:r>
+          </a:p>
+        </p:txBody>
+      </p:sp>
+      <p:sp>
+        <p:nvSpPr>
+          <p:cNvPr id="11" name="TextBox 10"/>
+          <p:cNvSpPr txBox="1"/>
+          <p:nvPr/>
+        </p:nvSpPr>
+        <p:spPr>
+          <a:xfrm>
+            <a:off x="896112" y="5038344"/>
+            <a:ext cx="1417320" cy="644652"/>
+          </a:xfrm>
+          <a:prstGeom prst="rect">
+            <a:avLst/>
+          </a:prstGeom>
+          <a:noFill/>
+        </p:spPr>
+        <p:txBody>
+          <a:bodyPr wrap="none" lIns="0" rIns="0" tIns="0" bIns="0">
+            <a:spAutoFit/>
+          </a:bodyPr>
+          <a:lstStyle/>
+          <a:p>
+            <a:pPr algn="l">
+              <a:lnSpc>
+                <a:spcPct val="145000"/>
+              </a:lnSpc>
+              <a:defRPr sz="900">
+                <a:solidFill>
+                  <a:srgbClr val="8F8F8F"/>
+                </a:solidFill>
+                <a:latin typeface="Pretendard"/>
+              </a:defRPr>
+            </a:pPr>
+            <a:r>
+              <a:rPr sz="900" b="0">
+                <a:solidFill>
+                  <a:srgbClr val="8F8F8F"/>
+                </a:solidFill>
+                <a:latin typeface="Pretendard"/>
+                <a:ea typeface="Pretendard"/>
+                <a:cs typeface="Pretendard"/>
+              </a:rPr>
+              <a:t/>
+            </a:r>
+          </a:p>
+          <a:p>
+            <a:pPr algn="l">
+              <a:lnSpc>
+                <a:spcPct val="145000"/>
+              </a:lnSpc>
+              <a:defRPr sz="1000">
+                <a:solidFill>
+                  <a:srgbClr val="171717"/>
+                </a:solidFill>
+                <a:latin typeface="Pretendard Medium"/>
+              </a:defRPr>
+            </a:pPr>
+            <a:r>
+              <a:rPr sz="1000" b="0">
+                <a:solidFill>
+                  <a:srgbClr val="171717"/>
+                </a:solidFill>
+                <a:latin typeface="Pretendard Medium"/>
+                <a:ea typeface="Pretendard Medium"/>
+                <a:cs typeface="Pretendard Medium"/>
+              </a:rPr>
+              <a:t>유효화소</a:t>
+            </a:r>
+          </a:p>
+          <a:p>
+            <a:pPr algn="l">
+              <a:lnSpc>
+                <a:spcPct val="145000"/>
+              </a:lnSpc>
+              <a:defRPr sz="1000">
+                <a:solidFill>
+                  <a:srgbClr val="4D4D4D"/>
+                </a:solidFill>
+                <a:latin typeface="Pretendard"/>
+              </a:defRPr>
+            </a:pPr>
+            <a:r>
+              <a:rPr sz="1000" b="0">
+                <a:solidFill>
+                  <a:srgbClr val="4D4D4D"/>
+                </a:solidFill>
+                <a:latin typeface="Pretendard"/>
+                <a:ea typeface="Pretendard"/>
+                <a:cs typeface="Pretendard"/>
+              </a:rPr>
+              <a:t>5cm 이내</a:t>
+            </a:r>
+          </a:p>
+        </p:txBody>
+      </p:sp>
+      <p:sp>
+        <p:nvSpPr>
+          <p:cNvPr id="12" name="TextBox 11"/>
+          <p:cNvSpPr txBox="1"/>
+          <p:nvPr/>
+        </p:nvSpPr>
+        <p:spPr>
+          <a:xfrm>
+            <a:off x="2313432" y="5038344"/>
+            <a:ext cx="1234440" cy="644652"/>
+          </a:xfrm>
+          <a:prstGeom prst="rect">
+            <a:avLst/>
+          </a:prstGeom>
+          <a:noFill/>
+        </p:spPr>
+        <p:txBody>
+          <a:bodyPr wrap="none" lIns="0" rIns="0" tIns="0" bIns="0">
+            <a:spAutoFit/>
+          </a:bodyPr>
+          <a:lstStyle/>
+          <a:p>
+            <a:pPr algn="r">
+              <a:lnSpc>
+                <a:spcPct val="145000"/>
+              </a:lnSpc>
+              <a:defRPr sz="900">
+                <a:solidFill>
+                  <a:srgbClr val="8F8F8F"/>
+                </a:solidFill>
+                <a:latin typeface="Pretendard"/>
+              </a:defRPr>
+            </a:pPr>
+            <a:r>
+              <a:rPr sz="900" b="0">
+                <a:solidFill>
+                  <a:srgbClr val="8F8F8F"/>
+                </a:solidFill>
+                <a:latin typeface="Pretendard"/>
+                <a:ea typeface="Pretendard"/>
+                <a:cs typeface="Pretendard"/>
+              </a:rPr>
+              <a:t>현재</a:t>
+            </a:r>
+          </a:p>
+          <a:p>
+            <a:pPr algn="r">
+              <a:lnSpc>
+                <a:spcPct val="145000"/>
+              </a:lnSpc>
+              <a:defRPr sz="1000">
+                <a:solidFill>
+                  <a:srgbClr val="171717"/>
+                </a:solidFill>
+                <a:latin typeface="Pretendard Medium"/>
+              </a:defRPr>
+            </a:pPr>
+            <a:r>
+              <a:rPr sz="1000" b="0">
+                <a:solidFill>
+                  <a:srgbClr val="171717"/>
+                </a:solidFill>
+                <a:latin typeface="Pretendard Medium"/>
+                <a:ea typeface="Pretendard Medium"/>
+                <a:cs typeface="Pretendard Medium"/>
+              </a:rPr>
+              <a:t>60.2%</a:t>
+            </a:r>
+          </a:p>
+          <a:p>
+            <a:pPr algn="r">
+              <a:lnSpc>
+                <a:spcPct val="145000"/>
+              </a:lnSpc>
+              <a:defRPr sz="1000">
+                <a:solidFill>
+                  <a:srgbClr val="4D4D4D"/>
+                </a:solidFill>
+                <a:latin typeface="Pretendard"/>
+              </a:defRPr>
+            </a:pPr>
+            <a:r>
+              <a:rPr sz="1000" b="0">
+                <a:solidFill>
+                  <a:srgbClr val="4D4D4D"/>
+                </a:solidFill>
+                <a:latin typeface="Pretendard"/>
+                <a:ea typeface="Pretendard"/>
+                <a:cs typeface="Pretendard"/>
+              </a:rPr>
+              <a:t>91.6%</a:t>
+            </a:r>
+          </a:p>
+        </p:txBody>
+      </p:sp>
+      <p:sp>
+        <p:nvSpPr>
+          <p:cNvPr id="13" name="TextBox 12"/>
+          <p:cNvSpPr txBox="1"/>
+          <p:nvPr/>
+        </p:nvSpPr>
+        <p:spPr>
+          <a:xfrm>
+            <a:off x="3547872" y="5038344"/>
+            <a:ext cx="1234440" cy="644652"/>
+          </a:xfrm>
+          <a:prstGeom prst="rect">
+            <a:avLst/>
+          </a:prstGeom>
+          <a:noFill/>
+        </p:spPr>
+        <p:txBody>
+          <a:bodyPr wrap="none" lIns="0" rIns="0" tIns="0" bIns="0">
+            <a:spAutoFit/>
+          </a:bodyPr>
+          <a:lstStyle/>
+          <a:p>
+            <a:pPr algn="r">
+              <a:lnSpc>
+                <a:spcPct val="145000"/>
+              </a:lnSpc>
+              <a:defRPr sz="900">
+                <a:solidFill>
+                  <a:srgbClr val="8F8F8F"/>
+                </a:solidFill>
+                <a:latin typeface="Pretendard"/>
+              </a:defRPr>
+            </a:pPr>
+            <a:r>
+              <a:rPr sz="900" b="0">
+                <a:solidFill>
+                  <a:srgbClr val="8F8F8F"/>
+                </a:solidFill>
+                <a:latin typeface="Pretendard"/>
+                <a:ea typeface="Pretendard"/>
+                <a:cs typeface="Pretendard"/>
+              </a:rPr>
+              <a:t>좁힘</a:t>
+            </a:r>
+          </a:p>
+          <a:p>
+            <a:pPr algn="r">
+              <a:lnSpc>
+                <a:spcPct val="145000"/>
+              </a:lnSpc>
+              <a:defRPr sz="1000">
+                <a:solidFill>
+                  <a:srgbClr val="171717"/>
+                </a:solidFill>
+                <a:latin typeface="Pretendard Medium"/>
+              </a:defRPr>
+            </a:pPr>
+            <a:r>
+              <a:rPr sz="1000" b="0">
+                <a:solidFill>
+                  <a:srgbClr val="171717"/>
+                </a:solidFill>
+                <a:latin typeface="Pretendard Medium"/>
+                <a:ea typeface="Pretendard Medium"/>
+                <a:cs typeface="Pretendard Medium"/>
+              </a:rPr>
+              <a:t>81.3%</a:t>
+            </a:r>
+          </a:p>
+          <a:p>
+            <a:pPr algn="r">
+              <a:lnSpc>
+                <a:spcPct val="145000"/>
+              </a:lnSpc>
+              <a:defRPr sz="1000">
+                <a:solidFill>
+                  <a:srgbClr val="4D4D4D"/>
+                </a:solidFill>
+                <a:latin typeface="Pretendard"/>
+              </a:defRPr>
+            </a:pPr>
+            <a:r>
+              <a:rPr sz="1000" b="0">
+                <a:solidFill>
+                  <a:srgbClr val="4D4D4D"/>
+                </a:solidFill>
+                <a:latin typeface="Pretendard"/>
+                <a:ea typeface="Pretendard"/>
+                <a:cs typeface="Pretendard"/>
+              </a:rPr>
+              <a:t>92.6%</a:t>
+            </a:r>
+          </a:p>
+        </p:txBody>
+      </p:sp>
+      <p:sp>
+        <p:nvSpPr>
+          <p:cNvPr id="14" name="Rounded Rectangle 13"/>
+          <p:cNvSpPr/>
+          <p:nvPr/>
+        </p:nvSpPr>
+        <p:spPr>
+          <a:xfrm>
+            <a:off x="6364224" y="4590288"/>
+            <a:ext cx="5166360" cy="1700784"/>
+          </a:xfrm>
+          <a:prstGeom prst="roundRect">
+            <a:avLst>
+              <a:gd name="adj" fmla="val 6720"/>
+            </a:avLst>
+          </a:prstGeom>
+          <a:solidFill>
+            <a:srgbClr val="FFFFFF"/>
+          </a:solidFill>
+          <a:ln w="9525">
+            <a:solidFill>
+              <a:srgbClr val="EBEBEB"/>
+            </a:solidFill>
+          </a:ln>
+          <a:effectLst/>
+        </p:spPr>
+        <p:style>
+          <a:lnRef idx="1">
+            <a:schemeClr val="accent1"/>
+          </a:lnRef>
+          <a:fillRef idx="3">
+            <a:schemeClr val="accent1"/>
+          </a:fillRef>
+          <a:effectRef idx="2">
+            <a:schemeClr val="accent1"/>
+          </a:effectRef>
+          <a:fontRef idx="minor">
+            <a:schemeClr val="lt1"/>
+          </a:fontRef>
+        </p:style>
+        <p:txBody>
+          <a:bodyPr rtlCol="0" anchor="ctr"/>
+          <a:lstStyle/>
+          <a:p>
+            <a:pPr algn="ctr"/>
+          </a:p>
+        </p:txBody>
+      </p:sp>
+      <p:sp>
+        <p:nvSpPr>
+          <p:cNvPr id="15" name="TextBox 14"/>
+          <p:cNvSpPr txBox="1"/>
+          <p:nvPr/>
+        </p:nvSpPr>
+        <p:spPr>
+          <a:xfrm>
+            <a:off x="6601968" y="4764024"/>
+            <a:ext cx="4690872" cy="219456"/>
+          </a:xfrm>
+          <a:prstGeom prst="rect">
+            <a:avLst/>
+          </a:prstGeom>
+          <a:noFill/>
+        </p:spPr>
+        <p:txBody>
+          <a:bodyPr wrap="square" lIns="0" rIns="0" tIns="0" bIns="0">
+            <a:spAutoFit/>
+          </a:bodyPr>
+          <a:lstStyle/>
+          <a:p>
+            <a:pPr algn="l">
+              <a:lnSpc>
+                <a:spcPct val="135000"/>
+              </a:lnSpc>
+              <a:defRPr sz="1050">
+                <a:solidFill>
+                  <a:srgbClr val="171717"/>
+                </a:solidFill>
+                <a:latin typeface="Pretendard SemiBold"/>
+              </a:defRPr>
+            </a:pPr>
+            <a:r>
+              <a:rPr sz="1050" b="0">
+                <a:solidFill>
+                  <a:srgbClr val="171717"/>
+                </a:solidFill>
+                <a:latin typeface="Pretendard SemiBold"/>
+                <a:ea typeface="Pretendard SemiBold"/>
+                <a:cs typeface="Pretendard SemiBold"/>
+              </a:rPr>
+              <a:t>다만 공짜가 아닙니다</a:t>
+            </a:r>
+          </a:p>
+        </p:txBody>
+      </p:sp>
+      <p:sp>
+        <p:nvSpPr>
+          <p:cNvPr id="16" name="TextBox 15"/>
+          <p:cNvSpPr txBox="1"/>
+          <p:nvPr/>
+        </p:nvSpPr>
+        <p:spPr>
+          <a:xfrm>
+            <a:off x="6601968" y="5010912"/>
+            <a:ext cx="4690872" cy="1097280"/>
+          </a:xfrm>
+          <a:prstGeom prst="rect">
+            <a:avLst/>
+          </a:prstGeom>
+          <a:noFill/>
+        </p:spPr>
+        <p:txBody>
+          <a:bodyPr wrap="square" lIns="0" rIns="0" tIns="0" bIns="0">
+            <a:spAutoFit/>
+          </a:bodyPr>
+          <a:lstStyle/>
+          <a:p>
+            <a:pPr algn="l">
+              <a:lnSpc>
+                <a:spcPct val="130000"/>
+              </a:lnSpc>
+              <a:defRPr sz="1000">
+                <a:solidFill>
+                  <a:srgbClr val="4D4D4D"/>
+                </a:solidFill>
+                <a:latin typeface="Pretendard"/>
+              </a:defRPr>
+            </a:pPr>
+            <a:r>
+              <a:rPr sz="1000" b="0">
+                <a:solidFill>
+                  <a:srgbClr val="4D4D4D"/>
+                </a:solidFill>
+                <a:latin typeface="Pretendard"/>
+                <a:ea typeface="Pretendard"/>
+                <a:cs typeface="Pretendard"/>
+              </a:rPr>
+              <a:t>다른 쌍에서는 커버리지만 오르고 정확도가 떨어집니다.</a:t>
+            </a:r>
+          </a:p>
+          <a:p>
+            <a:pPr algn="l">
+              <a:lnSpc>
+                <a:spcPct val="130000"/>
+              </a:lnSpc>
+              <a:defRPr sz="1000">
+                <a:solidFill>
+                  <a:srgbClr val="4D4D4D"/>
+                </a:solidFill>
+                <a:latin typeface="Pretendard"/>
+              </a:defRPr>
+            </a:pPr>
+            <a:r>
+              <a:rPr sz="1000" b="0">
+                <a:solidFill>
+                  <a:srgbClr val="4D4D4D"/>
+                </a:solidFill>
+                <a:latin typeface="Pretendard"/>
+                <a:ea typeface="Pretendard"/>
+                <a:cs typeface="Pretendard"/>
+              </a:rPr>
+              <a:t>탐색 후보가 줄면 uniquenessRatio 검사를 통과하기 쉬워져</a:t>
+            </a:r>
+          </a:p>
+          <a:p>
+            <a:pPr algn="l">
+              <a:lnSpc>
+                <a:spcPct val="130000"/>
+              </a:lnSpc>
+              <a:defRPr sz="1000">
+                <a:solidFill>
+                  <a:srgbClr val="4D4D4D"/>
+                </a:solidFill>
+                <a:latin typeface="Pretendard"/>
+              </a:defRPr>
+            </a:pPr>
+            <a:r>
+              <a:rPr sz="1000" b="0">
+                <a:solidFill>
+                  <a:srgbClr val="4D4D4D"/>
+                </a:solidFill>
+                <a:latin typeface="Pretendard"/>
+                <a:ea typeface="Pretendard"/>
+                <a:cs typeface="Pretendard"/>
+              </a:rPr>
+              <a:t>원래는 기각됐을 애매한 대응이 살아남기 때문입니다.</a:t>
+            </a:r>
+          </a:p>
+          <a:p>
+            <a:pPr algn="l">
+              <a:lnSpc>
+                <a:spcPct val="130000"/>
+              </a:lnSpc>
+              <a:defRPr sz="400">
+                <a:solidFill>
+                  <a:srgbClr val="4D4D4D"/>
+                </a:solidFill>
+                <a:latin typeface="Pretendard"/>
+              </a:defRPr>
+            </a:pPr>
+            <a:r>
+              <a:rPr sz="400" b="0">
+                <a:solidFill>
+                  <a:srgbClr val="4D4D4D"/>
+                </a:solidFill>
+                <a:latin typeface="Pretendard"/>
+                <a:ea typeface="Pretendard"/>
+                <a:cs typeface="Pretendard"/>
+              </a:rPr>
+              <a:t/>
+            </a:r>
+          </a:p>
+          <a:p>
+            <a:pPr algn="l">
+              <a:lnSpc>
+                <a:spcPct val="130000"/>
+              </a:lnSpc>
+              <a:defRPr sz="1000">
+                <a:solidFill>
+                  <a:srgbClr val="171717"/>
+                </a:solidFill>
+                <a:latin typeface="Pretendard Medium"/>
+              </a:defRPr>
+            </a:pPr>
+            <a:r>
+              <a:rPr sz="1000" b="0">
+                <a:solidFill>
+                  <a:srgbClr val="171717"/>
+                </a:solidFill>
+                <a:latin typeface="Pretendard Medium"/>
+                <a:ea typeface="Pretendard Medium"/>
+                <a:cs typeface="Pretendard Medium"/>
+              </a:rPr>
+              <a:t>트레이드오프라 채택하지 않고 측정값만 남겼습니다.</a:t>
+            </a:r>
+          </a:p>
+        </p:txBody>
+      </p:sp>
     </p:spTree>
   </p:cSld>
   <p:clrMapOvr>

--- a/02_2d_to_3d/report/2차업무_정승원.pptx
+++ b/02_2d_to_3d/report/2차업무_정승원.pptx
@@ -761,87 +761,98 @@
           <a:lstStyle/>
           <a:p>
             <a:r>
-              <a:t>과제가 요구한 마지막 단계, 2D 에서 3D 로의 변환 결과입니다.</a:t>
+              <a:t>2D 에서 3D 로의 변환 결과입니다. 네 장을 왼쪽부터 봐 주십시오.</a:t>
             </a:r>
           </a:p>
           <a:p/>
           <a:p>
             <a:r>
-              <a:t>깊이 맵의 각 화소를 카메라 광선을 따라 Z 만큼 밀어내면 3D 점이 됩니다. X 는 u 빼기</a:t>
-            </a:r>
-          </a:p>
-          <a:p>
-            <a:r>
-              <a:t>cx 곱하기 Z 나누기 f 이고 Y 도 같은 식입니다. 세 축이 전부 미터입니다. 과제 예시</a:t>
-            </a:r>
-          </a:p>
-          <a:p>
-            <a:r>
-              <a:t>코드는 X, Y 가 픽셀 인덱스이고 Z 가 0에서 255 밝기값이라 세 축의 단위가 서로 다릅니다.</a:t>
-            </a:r>
-          </a:p>
-          <a:p>
-            <a:r>
-              <a:t>맨 오른쪽이 그것이고 납작한 판으로 나옵니다.</a:t>
+              <a:t>첫 번째가 정답 메시입니다. 두 번째가 경로 A, 영상 두 장으로 만든 스테레오 복원</a:t>
+            </a:r>
+          </a:p>
+          <a:p>
+            <a:r>
+              <a:t>5,711점입니다. 정확합니다 — 깊이 오차 중앙값이 0.9센티미터입니다. 그런데</a:t>
+            </a:r>
+          </a:p>
+          <a:p>
+            <a:r>
+              <a:t>정답과 비교해 보시면 한쪽 면만 있습니다. 표면의 28퍼센트입니다.</a:t>
             </a:r>
           </a:p>
           <a:p/>
           <a:p>
             <a:r>
-              <a:t>왼쪽이 정답 메시, 가운데가 스테레오 복원 5,711점입니다.</a:t>
+              <a:t>단일 시점이 뒷면을 못 보는 것은 알고리즘 문제가 아니라 원리 문제입니다. 그래서 시점을</a:t>
+            </a:r>
+          </a:p>
+          <a:p>
+            <a:r>
+              <a:t>늘려 봤습니다. 쌍 선별 조건을 풀어 후보를 121쌍까지 늘리고 전부 융합해도</a:t>
+            </a:r>
+          </a:p>
+          <a:p>
+            <a:r>
+              <a:t>47퍼센트에서 멈춥니다. 121쌍 중 12쌍만 복원되기 때문입니다. 원인은 쌍 개수가</a:t>
+            </a:r>
+          </a:p>
+          <a:p>
+            <a:r>
+              <a:t>아니라 무늬 부족이었습니다. 앞 장에서 조명을 뒤집었을 때와 같은 결론입니다.</a:t>
             </a:r>
           </a:p>
           <a:p/>
           <a:p>
             <a:r>
-              <a:t>수치는 오차 중앙값 0.9센티미터, 5센티미터 이내가 91.6퍼센트입니다.</a:t>
-            </a:r>
-          </a:p>
-          <a:p>
-            <a:r>
-              <a:t>예시 코드는 5.1센티미터, 49.5퍼센트입니다. 격차가 5.7배입니다.</a:t>
+              <a:t>그래서 세 번째, 경로 B 를 함께 만들었습니다. 실루엣과 자세만으로 복셀을 깎는</a:t>
+            </a:r>
+          </a:p>
+          <a:p>
+            <a:r>
+              <a:t>visual hull 입니다. 무늬가 필요 없으니 스테레오에 최악인 조건이 오히려 유리합니다.</a:t>
+            </a:r>
+          </a:p>
+          <a:p>
+            <a:r>
+              <a:t>20뷰로 표면의 97퍼센트를 덮습니다.</a:t>
             </a:r>
           </a:p>
           <a:p/>
           <a:p>
             <a:r>
-              <a:t>채점 화소를 맞춘 점을 짚어 두겠습니다. 스테레오는 정합에 실패한 화소를 버리므로,</a:t>
-            </a:r>
-          </a:p>
-          <a:p>
-            <a:r>
-              <a:t>대조군을 실루엣 전체에서 채점하면 두 방법이 서로 다른 화소에서 채점됩니다. 그래서</a:t>
-            </a:r>
-          </a:p>
-          <a:p>
-            <a:r>
-              <a:t>스테레오가 값을 낸 60퍼센트 화소에서 대조군도 다시 채점했고, 표의 숫자가</a:t>
-            </a:r>
-          </a:p>
-          <a:p>
-            <a:r>
-              <a:t>그것입니다.</a:t>
+              <a:t>두 경로의 약점이 상보적입니다. A 는 정확하지만 보이는 면만, B 는 전방위지만 실루엣의</a:t>
+            </a:r>
+          </a:p>
+          <a:p>
+            <a:r>
+              <a:t>교집합이라 오목한 곳을 못 만듭니다. 합치면 98퍼센트입니다.</a:t>
             </a:r>
           </a:p>
           <a:p/>
           <a:p>
             <a:r>
-              <a:t>Chamfer 는 양방향으로 봐 주십시오. pred 에서 GT 가 0.0128로 작다는 것은 복원한</a:t>
-            </a:r>
-          </a:p>
-          <a:p>
-            <a:r>
-              <a:t>점이 전부 표면 근처에 있다는 뜻이고, GT 에서 pred 가 그 2.3배라는 것은 정답 표면의</a:t>
-            </a:r>
-          </a:p>
-          <a:p>
-            <a:r>
-              <a:t>상당 부분이 복원되지 않았다는 뜻입니다. 단일 시점이라 뒷면이 비어 있는 것이 숫자로</a:t>
-            </a:r>
-          </a:p>
-          <a:p>
-            <a:r>
-              <a:t>드러난 것입니다.</a:t>
+              <a:t>전제가 다르다는 점은 짚어 두겠습니다. B 는 정답 마스크와 정답 자세를 둘 다 씁니다.</a:t>
+            </a:r>
+          </a:p>
+          <a:p>
+            <a:r>
+              <a:t>A 는 마스크 없이도 동작합니다. 그래서 이 표는 어느 쪽이 낫다는 뜻이 아니라, 덮는</a:t>
+            </a:r>
+          </a:p>
+          <a:p>
+            <a:r>
+              <a:t>범위와 필요한 입력이 다른 두 경로라는 뜻입니다.</a:t>
+            </a:r>
+          </a:p>
+          <a:p/>
+          <a:p>
+            <a:r>
+              <a:t>맨 오른쪽은 과제 예시 코드입니다. X, Y 가 픽셀 인덱스이고 Z 가 0에서 255 밝기값이라</a:t>
+            </a:r>
+          </a:p>
+          <a:p>
+            <a:r>
+              <a:t>세 축의 단위가 서로 다릅니다. 납작한 판으로 나옵니다.</a:t>
             </a:r>
           </a:p>
         </p:txBody>
@@ -5732,7 +5743,7 @@
                 <a:ea typeface="Pretendard SemiBold"/>
                 <a:cs typeface="Pretendard SemiBold"/>
               </a:rPr>
-              <a:t>실제 위성 영상에서 깊이 오차 중앙값 0.9 cm</a:t>
+              <a:t>타겟 표면의 98% 를 복원했습니다</a:t>
             </a:r>
           </a:p>
         </p:txBody>
@@ -5779,7 +5790,7 @@
                 <a:ea typeface="Pretendard"/>
                 <a:cs typeface="Pretendard"/>
               </a:rPr>
-              <a:t>깊이 맵을 역투영해 5,711점의 포인트 클라우드로 · 대조군에는 정답에 맞춘 최적 정렬을 적용하고 같은 5,711개 화소에서 채점</a:t>
+              <a:t>두 경로를 같은 지표로 비교 · 정답 메시 표면 40만 점 중 복원점이 2 cm 안에 있는 비율</a:t>
             </a:r>
           </a:p>
         </p:txBody>
@@ -5895,8 +5906,8 @@
         </p:blipFill>
         <p:spPr>
           <a:xfrm>
-            <a:off x="2211323" y="1691639"/>
-            <a:ext cx="7766304" cy="2615184"/>
+            <a:off x="1101851" y="1691639"/>
+            <a:ext cx="9985248" cy="2615184"/>
           </a:xfrm>
           <a:prstGeom prst="rect">
             <a:avLst/>
@@ -5993,7 +6004,7 @@
                 <a:ea typeface="Pretendard SemiBold"/>
                 <a:cs typeface="Pretendard SemiBold"/>
               </a:rPr>
-              <a:t>깊이 정확도</a:t>
+              <a:t>표면 커버리지</a:t>
             </a:r>
           </a:p>
         </p:txBody>
@@ -6007,7 +6018,7 @@
         <p:spPr>
           <a:xfrm>
             <a:off x="896112" y="5038344"/>
-            <a:ext cx="1325880" cy="644652"/>
+            <a:ext cx="1920240" cy="859536"/>
           </a:xfrm>
           <a:prstGeom prst="rect">
             <a:avLst/>
@@ -6050,21 +6061,21 @@
               </a:lnSpc>
               <a:defRPr sz="1000">
                 <a:solidFill>
-                  <a:srgbClr val="171717"/>
-                </a:solidFill>
-                <a:latin typeface="Pretendard Medium"/>
+                  <a:srgbClr val="4D4D4D"/>
+                </a:solidFill>
+                <a:latin typeface="Pretendard"/>
               </a:defRPr>
             </a:pPr>
             <a:r>
               <a:rPr sz="1000" b="0">
                 <a:solidFill>
-                  <a:srgbClr val="171717"/>
-                </a:solidFill>
-                <a:latin typeface="Pretendard Medium"/>
-                <a:ea typeface="Pretendard Medium"/>
-                <a:cs typeface="Pretendard Medium"/>
+                  <a:srgbClr val="4D4D4D"/>
+                </a:solidFill>
+                <a:latin typeface="Pretendard"/>
+                <a:ea typeface="Pretendard"/>
+                <a:cs typeface="Pretendard"/>
               </a:rPr>
-              <a:t>스테레오</a:t>
+              <a:t>A 스테레오 (2장)</a:t>
             </a:r>
           </a:p>
           <a:p>
@@ -6088,7 +6099,31 @@
                 <a:ea typeface="Pretendard"/>
                 <a:cs typeface="Pretendard"/>
               </a:rPr>
-              <a:t>과제 예시</a:t>
+              <a:t>B 실루엣 카빙 (20뷰)</a:t>
+            </a:r>
+          </a:p>
+          <a:p>
+            <a:pPr algn="l">
+              <a:lnSpc>
+                <a:spcPct val="145000"/>
+              </a:lnSpc>
+              <a:defRPr sz="1000">
+                <a:solidFill>
+                  <a:srgbClr val="171717"/>
+                </a:solidFill>
+                <a:latin typeface="Pretendard Medium"/>
+              </a:defRPr>
+            </a:pPr>
+            <a:r>
+              <a:rPr sz="1000" b="0">
+                <a:solidFill>
+                  <a:srgbClr val="171717"/>
+                </a:solidFill>
+                <a:latin typeface="Pretendard Medium"/>
+                <a:ea typeface="Pretendard Medium"/>
+                <a:cs typeface="Pretendard Medium"/>
+              </a:rPr>
+              <a:t>A + B</a:t>
             </a:r>
           </a:p>
         </p:txBody>
@@ -6101,8 +6136,8 @@
         </p:nvSpPr>
         <p:spPr>
           <a:xfrm>
-            <a:off x="2221991" y="5038344"/>
-            <a:ext cx="1188720" cy="644652"/>
+            <a:off x="2816352" y="5038344"/>
+            <a:ext cx="1051560" cy="859536"/>
           </a:xfrm>
           <a:prstGeom prst="rect">
             <a:avLst/>
@@ -6135,7 +6170,7 @@
                 <a:ea typeface="Pretendard"/>
                 <a:cs typeface="Pretendard"/>
               </a:rPr>
-              <a:t>RMSE</a:t>
+              <a:t>점 수</a:t>
             </a:r>
           </a:p>
           <a:p>
@@ -6145,21 +6180,21 @@
               </a:lnSpc>
               <a:defRPr sz="1000">
                 <a:solidFill>
-                  <a:srgbClr val="171717"/>
-                </a:solidFill>
-                <a:latin typeface="Pretendard Medium"/>
+                  <a:srgbClr val="4D4D4D"/>
+                </a:solidFill>
+                <a:latin typeface="Pretendard"/>
               </a:defRPr>
             </a:pPr>
             <a:r>
               <a:rPr sz="1000" b="0">
                 <a:solidFill>
-                  <a:srgbClr val="171717"/>
-                </a:solidFill>
-                <a:latin typeface="Pretendard Medium"/>
-                <a:ea typeface="Pretendard Medium"/>
-                <a:cs typeface="Pretendard Medium"/>
+                  <a:srgbClr val="4D4D4D"/>
+                </a:solidFill>
+                <a:latin typeface="Pretendard"/>
+                <a:ea typeface="Pretendard"/>
+                <a:cs typeface="Pretendard"/>
               </a:rPr>
-              <a:t>0.0650 m</a:t>
+              <a:t>5,711</a:t>
             </a:r>
           </a:p>
           <a:p>
@@ -6183,7 +6218,31 @@
                 <a:ea typeface="Pretendard"/>
                 <a:cs typeface="Pretendard"/>
               </a:rPr>
-              <a:t>0.0886 m</a:t>
+              <a:t>9,762</a:t>
+            </a:r>
+          </a:p>
+          <a:p>
+            <a:pPr algn="r">
+              <a:lnSpc>
+                <a:spcPct val="145000"/>
+              </a:lnSpc>
+              <a:defRPr sz="1000">
+                <a:solidFill>
+                  <a:srgbClr val="171717"/>
+                </a:solidFill>
+                <a:latin typeface="Pretendard Medium"/>
+              </a:defRPr>
+            </a:pPr>
+            <a:r>
+              <a:rPr sz="1000" b="0">
+                <a:solidFill>
+                  <a:srgbClr val="171717"/>
+                </a:solidFill>
+                <a:latin typeface="Pretendard Medium"/>
+                <a:ea typeface="Pretendard Medium"/>
+                <a:cs typeface="Pretendard Medium"/>
+              </a:rPr>
+              <a:t>15,473</a:t>
             </a:r>
           </a:p>
         </p:txBody>
@@ -6196,8 +6255,8 @@
         </p:nvSpPr>
         <p:spPr>
           <a:xfrm>
-            <a:off x="3410712" y="5038344"/>
-            <a:ext cx="1188720" cy="644652"/>
+            <a:off x="3867912" y="5038344"/>
+            <a:ext cx="1188720" cy="859536"/>
           </a:xfrm>
           <a:prstGeom prst="rect">
             <a:avLst/>
@@ -6230,7 +6289,7 @@
                 <a:ea typeface="Pretendard"/>
                 <a:cs typeface="Pretendard"/>
               </a:rPr>
-              <a:t>오차 중앙값</a:t>
+              <a:t>표면 덮음</a:t>
             </a:r>
           </a:p>
           <a:p>
@@ -6240,21 +6299,21 @@
               </a:lnSpc>
               <a:defRPr sz="1000">
                 <a:solidFill>
-                  <a:srgbClr val="171717"/>
-                </a:solidFill>
-                <a:latin typeface="Pretendard Medium"/>
+                  <a:srgbClr val="4D4D4D"/>
+                </a:solidFill>
+                <a:latin typeface="Pretendard"/>
               </a:defRPr>
             </a:pPr>
             <a:r>
               <a:rPr sz="1000" b="0">
                 <a:solidFill>
-                  <a:srgbClr val="171717"/>
-                </a:solidFill>
-                <a:latin typeface="Pretendard Medium"/>
-                <a:ea typeface="Pretendard Medium"/>
-                <a:cs typeface="Pretendard Medium"/>
+                  <a:srgbClr val="4D4D4D"/>
+                </a:solidFill>
+                <a:latin typeface="Pretendard"/>
+                <a:ea typeface="Pretendard"/>
+                <a:cs typeface="Pretendard"/>
               </a:rPr>
-              <a:t>0.9 cm</a:t>
+              <a:t>27.6%</a:t>
             </a:r>
           </a:p>
           <a:p>
@@ -6278,54 +6337,7 @@
                 <a:ea typeface="Pretendard"/>
                 <a:cs typeface="Pretendard"/>
               </a:rPr>
-              <a:t>5.1 cm</a:t>
-            </a:r>
-          </a:p>
-        </p:txBody>
-      </p:sp>
-      <p:sp>
-        <p:nvSpPr>
-          <p:cNvPr id="14" name="TextBox 13"/>
-          <p:cNvSpPr txBox="1"/>
-          <p:nvPr/>
-        </p:nvSpPr>
-        <p:spPr>
-          <a:xfrm>
-            <a:off x="4599431" y="5038344"/>
-            <a:ext cx="960120" cy="644652"/>
-          </a:xfrm>
-          <a:prstGeom prst="rect">
-            <a:avLst/>
-          </a:prstGeom>
-          <a:noFill/>
-        </p:spPr>
-        <p:txBody>
-          <a:bodyPr wrap="none" lIns="0" rIns="0" tIns="0" bIns="0">
-            <a:spAutoFit/>
-          </a:bodyPr>
-          <a:lstStyle/>
-          <a:p>
-            <a:pPr algn="r">
-              <a:lnSpc>
-                <a:spcPct val="145000"/>
-              </a:lnSpc>
-              <a:defRPr sz="900">
-                <a:solidFill>
-                  <a:srgbClr val="8F8F8F"/>
-                </a:solidFill>
-                <a:latin typeface="Pretendard"/>
-              </a:defRPr>
-            </a:pPr>
-            <a:r>
-              <a:rPr sz="900" b="0">
-                <a:solidFill>
-                  <a:srgbClr val="8F8F8F"/>
-                </a:solidFill>
-                <a:latin typeface="Pretendard"/>
-                <a:ea typeface="Pretendard"/>
-                <a:cs typeface="Pretendard"/>
-              </a:rPr>
-              <a:t>5cm 이내</a:t>
+              <a:t>96.6%</a:t>
             </a:r>
           </a:p>
           <a:p>
@@ -6349,38 +6361,14 @@
                 <a:ea typeface="Pretendard Medium"/>
                 <a:cs typeface="Pretendard Medium"/>
               </a:rPr>
-              <a:t>91.6%</a:t>
-            </a:r>
-          </a:p>
-          <a:p>
-            <a:pPr algn="r">
-              <a:lnSpc>
-                <a:spcPct val="145000"/>
-              </a:lnSpc>
-              <a:defRPr sz="1000">
-                <a:solidFill>
-                  <a:srgbClr val="4D4D4D"/>
-                </a:solidFill>
-                <a:latin typeface="Pretendard"/>
-              </a:defRPr>
-            </a:pPr>
-            <a:r>
-              <a:rPr sz="1000" b="0">
-                <a:solidFill>
-                  <a:srgbClr val="4D4D4D"/>
-                </a:solidFill>
-                <a:latin typeface="Pretendard"/>
-                <a:ea typeface="Pretendard"/>
-                <a:cs typeface="Pretendard"/>
-              </a:rPr>
-              <a:t>49.5%</a:t>
-            </a:r>
-          </a:p>
-        </p:txBody>
-      </p:sp>
-      <p:sp>
-        <p:nvSpPr>
-          <p:cNvPr id="15" name="Rounded Rectangle 14"/>
+              <a:t>97.7%</a:t>
+            </a:r>
+          </a:p>
+        </p:txBody>
+      </p:sp>
+      <p:sp>
+        <p:nvSpPr>
+          <p:cNvPr id="14" name="Rounded Rectangle 13"/>
           <p:cNvSpPr/>
           <p:nvPr/>
         </p:nvSpPr>
@@ -6428,7 +6416,7 @@
       </p:sp>
       <p:sp>
         <p:nvSpPr>
-          <p:cNvPr id="16" name="TextBox 15"/>
+          <p:cNvPr id="15" name="TextBox 14"/>
           <p:cNvSpPr txBox="1"/>
           <p:nvPr/>
         </p:nvSpPr>
@@ -6468,14 +6456,14 @@
                 <a:ea typeface="Pretendard SemiBold"/>
                 <a:cs typeface="Pretendard SemiBold"/>
               </a:rPr>
-              <a:t>세 축이 전부 미터입니다</a:t>
-            </a:r>
-          </a:p>
-        </p:txBody>
-      </p:sp>
-      <p:sp>
-        <p:nvSpPr>
-          <p:cNvPr id="17" name="TextBox 16"/>
+              <a:t>약점이 상보적입니다</a:t>
+            </a:r>
+          </a:p>
+        </p:txBody>
+      </p:sp>
+      <p:sp>
+        <p:nvSpPr>
+          <p:cNvPr id="16" name="TextBox 15"/>
           <p:cNvSpPr txBox="1"/>
           <p:nvPr/>
         </p:nvSpPr>
@@ -6501,21 +6489,21 @@
               </a:lnSpc>
               <a:defRPr sz="1000">
                 <a:solidFill>
-                  <a:srgbClr val="4D4D4D"/>
-                </a:solidFill>
-                <a:latin typeface="Pretendard"/>
+                  <a:srgbClr val="171717"/>
+                </a:solidFill>
+                <a:latin typeface="Pretendard Medium"/>
               </a:defRPr>
             </a:pPr>
             <a:r>
               <a:rPr sz="1000" b="0">
                 <a:solidFill>
-                  <a:srgbClr val="4D4D4D"/>
-                </a:solidFill>
-                <a:latin typeface="Pretendard"/>
-                <a:ea typeface="Pretendard"/>
-                <a:cs typeface="Pretendard"/>
+                  <a:srgbClr val="171717"/>
+                </a:solidFill>
+                <a:latin typeface="Pretendard Medium"/>
+                <a:ea typeface="Pretendard Medium"/>
+                <a:cs typeface="Pretendard Medium"/>
               </a:rPr>
-              <a:t>과제 예시 코드는 X, Y 가 픽셀 인덱스이고 Z 가 밝기라</a:t>
+              <a:t>A 는 정확합니다 — 깊이 오차 중앙값 0.9 cm</a:t>
             </a:r>
           </a:p>
           <a:p>
@@ -6539,7 +6527,7 @@
                 <a:ea typeface="Pretendard"/>
                 <a:cs typeface="Pretendard"/>
               </a:rPr>
-              <a:t>단위가 서로 다릅니다. 맨 오른쪽이 그것입니다.</a:t>
+              <a:t>대신 단일 시점이라 뒷면을 원리적으로 못 봅니다.</a:t>
             </a:r>
           </a:p>
           <a:p>
@@ -6587,7 +6575,7 @@
                 <a:ea typeface="Pretendard Medium"/>
                 <a:cs typeface="Pretendard Medium"/>
               </a:rPr>
-              <a:t>Chamfer  pred→GT 0.0128  ·  GT→pred 0.0293</a:t>
+              <a:t>B 는 전방위입니다 — 무늬가 없어도 됩니다</a:t>
             </a:r>
           </a:p>
           <a:p>
@@ -6611,7 +6599,7 @@
                 <a:ea typeface="Pretendard"/>
                 <a:cs typeface="Pretendard"/>
               </a:rPr>
-              <a:t>뒤쪽이 큰 것이 단일 시점이라 뒷면이 빈다는 한계의 크기입니다.</a:t>
+              <a:t>대신 실루엣의 교집합이라 오목한 곳을 못 만듭니다.</a:t>
             </a:r>
           </a:p>
         </p:txBody>
@@ -6767,7 +6755,7 @@
                 <a:ea typeface="Pretendard SemiBold"/>
                 <a:cs typeface="Pretendard SemiBold"/>
               </a:rPr>
-              <a:t>유효화소 60% — 나머지는 답을 내지 못한 것입니다</a:t>
+              <a:t>스테레오를 전방위로 밀어봤지만 47% 에서 멈춥니다</a:t>
             </a:r>
           </a:p>
         </p:txBody>
@@ -7408,7 +7396,7 @@
                 <a:ea typeface="Pretendard SemiBold"/>
                 <a:cs typeface="Pretendard SemiBold"/>
               </a:rPr>
-              <a:t>다만 공짜가 아닙니다</a:t>
+              <a:t>쌍을 늘려도 벽이 있습니다</a:t>
             </a:r>
           </a:p>
         </p:txBody>
@@ -7455,7 +7443,7 @@
                 <a:ea typeface="Pretendard"/>
                 <a:cs typeface="Pretendard"/>
               </a:rPr>
-              <a:t>다른 쌍에서는 커버리지만 오르고 정확도가 떨어집니다.</a:t>
+              <a:t>후보를 121쌍으로 늘려도 12쌍만 복원됩니다.</a:t>
             </a:r>
           </a:p>
           <a:p>
@@ -7479,7 +7467,31 @@
                 <a:ea typeface="Pretendard"/>
                 <a:cs typeface="Pretendard"/>
               </a:rPr>
-              <a:t>탐색 후보가 줄면 uniquenessRatio 검사를 통과하기 쉬워져</a:t>
+              <a:t>일관성 필터를 걸면 정밀도는 오르지만 커버리지가 무너집니다.</a:t>
+            </a:r>
+          </a:p>
+          <a:p>
+            <a:pPr algn="l">
+              <a:lnSpc>
+                <a:spcPct val="130000"/>
+              </a:lnSpc>
+              <a:defRPr sz="400">
+                <a:solidFill>
+                  <a:srgbClr val="4D4D4D"/>
+                </a:solidFill>
+                <a:latin typeface="Pretendard"/>
+              </a:defRPr>
+            </a:pPr>
+            <a:r>
+              <a:rPr sz="400" b="0">
+                <a:solidFill>
+                  <a:srgbClr val="4D4D4D"/>
+                </a:solidFill>
+                <a:latin typeface="Pretendard"/>
+                <a:ea typeface="Pretendard"/>
+                <a:cs typeface="Pretendard"/>
+              </a:rPr>
+              <a:t/>
             </a:r>
           </a:p>
           <a:p>
@@ -7489,45 +7501,21 @@
               </a:lnSpc>
               <a:defRPr sz="1000">
                 <a:solidFill>
-                  <a:srgbClr val="4D4D4D"/>
-                </a:solidFill>
-                <a:latin typeface="Pretendard"/>
+                  <a:srgbClr val="171717"/>
+                </a:solidFill>
+                <a:latin typeface="Pretendard Medium"/>
               </a:defRPr>
             </a:pPr>
             <a:r>
               <a:rPr sz="1000" b="0">
                 <a:solidFill>
-                  <a:srgbClr val="4D4D4D"/>
-                </a:solidFill>
-                <a:latin typeface="Pretendard"/>
-                <a:ea typeface="Pretendard"/>
-                <a:cs typeface="Pretendard"/>
+                  <a:srgbClr val="171717"/>
+                </a:solidFill>
+                <a:latin typeface="Pretendard Medium"/>
+                <a:ea typeface="Pretendard Medium"/>
+                <a:cs typeface="Pretendard Medium"/>
               </a:rPr>
-              <a:t>원래는 기각됐을 애매한 대응이 살아남기 때문입니다.</a:t>
-            </a:r>
-          </a:p>
-          <a:p>
-            <a:pPr algn="l">
-              <a:lnSpc>
-                <a:spcPct val="130000"/>
-              </a:lnSpc>
-              <a:defRPr sz="400">
-                <a:solidFill>
-                  <a:srgbClr val="4D4D4D"/>
-                </a:solidFill>
-                <a:latin typeface="Pretendard"/>
-              </a:defRPr>
-            </a:pPr>
-            <a:r>
-              <a:rPr sz="400" b="0">
-                <a:solidFill>
-                  <a:srgbClr val="4D4D4D"/>
-                </a:solidFill>
-                <a:latin typeface="Pretendard"/>
-                <a:ea typeface="Pretendard"/>
-                <a:cs typeface="Pretendard"/>
-              </a:rPr>
-              <a:t/>
+              <a:t>원인은 쌍 개수가 아니라 무늬 부족입니다.</a:t>
             </a:r>
           </a:p>
           <a:p>
@@ -7537,21 +7525,21 @@
               </a:lnSpc>
               <a:defRPr sz="1000">
                 <a:solidFill>
-                  <a:srgbClr val="171717"/>
-                </a:solidFill>
-                <a:latin typeface="Pretendard Medium"/>
+                  <a:srgbClr val="4D4D4D"/>
+                </a:solidFill>
+                <a:latin typeface="Pretendard"/>
               </a:defRPr>
             </a:pPr>
             <a:r>
               <a:rPr sz="1000" b="0">
                 <a:solidFill>
-                  <a:srgbClr val="171717"/>
-                </a:solidFill>
-                <a:latin typeface="Pretendard Medium"/>
-                <a:ea typeface="Pretendard Medium"/>
-                <a:cs typeface="Pretendard Medium"/>
+                  <a:srgbClr val="4D4D4D"/>
+                </a:solidFill>
+                <a:latin typeface="Pretendard"/>
+                <a:ea typeface="Pretendard"/>
+                <a:cs typeface="Pretendard"/>
               </a:rPr>
-              <a:t>트레이드오프라 채택하지 않고 측정값만 남겼습니다.</a:t>
+              <a:t>그래서 전방위는 실루엣 기반으로 갔습니다 (앞 장).</a:t>
             </a:r>
           </a:p>
         </p:txBody>

--- a/02_2d_to_3d/report/2차업무_정승원.pptx
+++ b/02_2d_to_3d/report/2차업무_정승원.pptx
@@ -6456,7 +6456,7 @@
                 <a:ea typeface="Pretendard SemiBold"/>
                 <a:cs typeface="Pretendard SemiBold"/>
               </a:rPr>
-              <a:t>약점이 상보적입니다</a:t>
+              <a:t>같은 시점에서 두 깊이 맵을 비교하면</a:t>
             </a:r>
           </a:p>
         </p:txBody>
@@ -6503,7 +6503,7 @@
                 <a:ea typeface="Pretendard Medium"/>
                 <a:cs typeface="Pretendard Medium"/>
               </a:rPr>
-              <a:t>A 는 정확합니다 — 깊이 오차 중앙값 0.9 cm</a:t>
+              <a:t>A 오차 중앙값 0.9 cm · 유효화소 60%   (영상 2장)</a:t>
             </a:r>
           </a:p>
           <a:p>
@@ -6513,21 +6513,21 @@
               </a:lnSpc>
               <a:defRPr sz="1000">
                 <a:solidFill>
-                  <a:srgbClr val="4D4D4D"/>
-                </a:solidFill>
-                <a:latin typeface="Pretendard"/>
+                  <a:srgbClr val="171717"/>
+                </a:solidFill>
+                <a:latin typeface="Pretendard Medium"/>
               </a:defRPr>
             </a:pPr>
             <a:r>
               <a:rPr sz="1000" b="0">
                 <a:solidFill>
-                  <a:srgbClr val="4D4D4D"/>
-                </a:solidFill>
-                <a:latin typeface="Pretendard"/>
-                <a:ea typeface="Pretendard"/>
-                <a:cs typeface="Pretendard"/>
+                  <a:srgbClr val="171717"/>
+                </a:solidFill>
+                <a:latin typeface="Pretendard Medium"/>
+                <a:ea typeface="Pretendard Medium"/>
+                <a:cs typeface="Pretendard Medium"/>
               </a:rPr>
-              <a:t>대신 단일 시점이라 뒷면을 원리적으로 못 봅니다.</a:t>
+              <a:t>B 오차 중앙값 0.4 cm · 유효화소 100%   (마스크 20장)</a:t>
             </a:r>
           </a:p>
           <a:p>
@@ -6561,21 +6561,21 @@
               </a:lnSpc>
               <a:defRPr sz="1000">
                 <a:solidFill>
-                  <a:srgbClr val="171717"/>
-                </a:solidFill>
-                <a:latin typeface="Pretendard Medium"/>
+                  <a:srgbClr val="4D4D4D"/>
+                </a:solidFill>
+                <a:latin typeface="Pretendard"/>
               </a:defRPr>
             </a:pPr>
             <a:r>
               <a:rPr sz="1000" b="0">
                 <a:solidFill>
-                  <a:srgbClr val="171717"/>
-                </a:solidFill>
-                <a:latin typeface="Pretendard Medium"/>
-                <a:ea typeface="Pretendard Medium"/>
-                <a:cs typeface="Pretendard Medium"/>
+                  <a:srgbClr val="4D4D4D"/>
+                </a:solidFill>
+                <a:latin typeface="Pretendard"/>
+                <a:ea typeface="Pretendard"/>
+                <a:cs typeface="Pretendard"/>
               </a:rPr>
-              <a:t>B 는 전방위입니다 — 무늬가 없어도 됩니다</a:t>
+              <a:t>B 가 낫지만 입력이 열 배 많고 마스크는 정답입니다.</a:t>
             </a:r>
           </a:p>
           <a:p>
@@ -6599,7 +6599,7 @@
                 <a:ea typeface="Pretendard"/>
                 <a:cs typeface="Pretendard"/>
               </a:rPr>
-              <a:t>대신 실루엣의 교집합이라 오목한 곳을 못 만듭니다.</a:t>
+              <a:t>어느 쪽이 낫다가 아니라 필요한 입력이 다른 두 경로입니다.</a:t>
             </a:r>
           </a:p>
         </p:txBody>

--- a/02_2d_to_3d/report/2차업무_정승원.pptx
+++ b/02_2d_to_3d/report/2차업무_정승원.pptx
@@ -4992,7 +4992,7 @@
                 <a:ea typeface="Pretendard"/>
                 <a:cs typeface="Pretendard"/>
               </a:rPr>
-              <a:t>pytest 72개 · 손으로 풀 수 있는 조건을 만들어 수치까지 대조 · 실행 결과는 outputs/pytest_report.txt 에 저장</a:t>
+              <a:t>pytest 80개 · 손으로 풀 수 있는 조건을 만들어 수치까지 대조 · 실행 결과는 outputs/pytest_report.txt 에 저장</a:t>
             </a:r>
           </a:p>
         </p:txBody>
@@ -5444,7 +5444,7 @@
                 <a:ea typeface="Pretendard SemiBold"/>
                 <a:cs typeface="Pretendard SemiBold"/>
               </a:rPr>
-              <a:t>72개를 다섯 갈래로</a:t>
+              <a:t>80개를 다섯 갈래로</a:t>
             </a:r>
           </a:p>
         </p:txBody>

--- a/02_2d_to_3d/report/2차업무_정승원.pptx
+++ b/02_2d_to_3d/report/2차업무_정승원.pptx
@@ -976,17 +976,27 @@
           <a:p/>
           <a:p>
             <a:r>
-              <a:t>두 번째는 다중 뷰 융합입니다. 지금은 한 쌍만 씁니다. 쓸 만한 쌍이 5개 있으니</a:t>
-            </a:r>
-          </a:p>
-          <a:p>
-            <a:r>
-              <a:t>여러 쌍의 깊이를 합치면 한 쌍에서 비는 부분을 다른 쌍이 채웁니다. 지금 구조에서 가장</a:t>
-            </a:r>
-          </a:p>
-          <a:p>
-            <a:r>
-              <a:t>싸게 얻을 수 있는 개선이라고 봅니다. 이건 아직 재 보지 않았습니다.</a:t>
+              <a:t>두 번째로 아직 안 해 본 것은 스테레오와 카빙을 화소 단위로 합치는 것입니다. 지금은</a:t>
+            </a:r>
+          </a:p>
+          <a:p>
+            <a:r>
+              <a:t>두 점구름을 그냥 겹쳐 98퍼센트를 얻는데, 정밀도가 93에서</a:t>
+            </a:r>
+          </a:p>
+          <a:p>
+            <a:r>
+              <a:t>84퍼센트로 떨어집니다. 카빙이 만든 껍질 안쪽으로 스테레오 깊이를 밀어 넣어</a:t>
+            </a:r>
+          </a:p>
+          <a:p>
+            <a:r>
+              <a:t>오목한 부분만 파는 방식이 표준인데, 그러면 둘의 장점만 취할 수 있습니다. 이건</a:t>
+            </a:r>
+          </a:p>
+          <a:p>
+            <a:r>
+              <a:t>재 보지 않았습니다.</a:t>
             </a:r>
           </a:p>
           <a:p/>

--- a/02_2d_to_3d/report/2차업무_정승원.pptx
+++ b/02_2d_to_3d/report/2차업무_정승원.pptx
@@ -5118,8 +5118,8 @@
         </p:blipFill>
         <p:spPr>
           <a:xfrm>
-            <a:off x="1416258" y="1691639"/>
-            <a:ext cx="9356435" cy="2615184"/>
+            <a:off x="1013832" y="1691639"/>
+            <a:ext cx="10161287" cy="2615184"/>
           </a:xfrm>
           <a:prstGeom prst="rect">
             <a:avLst/>

--- a/02_2d_to_3d/report/2차업무_정승원.pptx
+++ b/02_2d_to_3d/report/2차업무_정승원.pptx
@@ -5753,7 +5753,7 @@
                 <a:ea typeface="Pretendard SemiBold"/>
                 <a:cs typeface="Pretendard SemiBold"/>
               </a:rPr>
-              <a:t>타겟 표면의 98% 를 복원했습니다</a:t>
+              <a:t>실루엣 카빙으로 타겟 표면의 97% 를 복원했습니다</a:t>
             </a:r>
           </a:p>
         </p:txBody>
@@ -5800,7 +5800,7 @@
                 <a:ea typeface="Pretendard"/>
                 <a:cs typeface="Pretendard"/>
               </a:rPr>
-              <a:t>두 경로를 같은 지표로 비교 · 정답 메시 표면 40만 점 중 복원점이 2 cm 안에 있는 비율</a:t>
+              <a:t>참고자료가 가리키는 스테레오부터 했지만 표면의 28% 에서 멈춰 갈아탔습니다 · 정답 메시 40만 점 중 복원점이 2 cm 안에 있는 비율</a:t>
             </a:r>
           </a:p>
         </p:txBody>
@@ -6028,7 +6028,7 @@
         <p:spPr>
           <a:xfrm>
             <a:off x="896112" y="5038344"/>
-            <a:ext cx="1920240" cy="859536"/>
+            <a:ext cx="1783080" cy="859536"/>
           </a:xfrm>
           <a:prstGeom prst="rect">
             <a:avLst/>
@@ -6095,21 +6095,21 @@
               </a:lnSpc>
               <a:defRPr sz="1000">
                 <a:solidFill>
-                  <a:srgbClr val="4D4D4D"/>
-                </a:solidFill>
-                <a:latin typeface="Pretendard"/>
+                  <a:srgbClr val="171717"/>
+                </a:solidFill>
+                <a:latin typeface="Pretendard Medium"/>
               </a:defRPr>
             </a:pPr>
             <a:r>
               <a:rPr sz="1000" b="0">
                 <a:solidFill>
-                  <a:srgbClr val="4D4D4D"/>
-                </a:solidFill>
-                <a:latin typeface="Pretendard"/>
-                <a:ea typeface="Pretendard"/>
-                <a:cs typeface="Pretendard"/>
+                  <a:srgbClr val="171717"/>
+                </a:solidFill>
+                <a:latin typeface="Pretendard Medium"/>
+                <a:ea typeface="Pretendard Medium"/>
+                <a:cs typeface="Pretendard Medium"/>
               </a:rPr>
-              <a:t>B 실루엣 카빙 (20뷰)</a:t>
+              <a:t>B 카빙 (20뷰)</a:t>
             </a:r>
           </a:p>
           <a:p>
@@ -6119,19 +6119,19 @@
               </a:lnSpc>
               <a:defRPr sz="1000">
                 <a:solidFill>
-                  <a:srgbClr val="171717"/>
-                </a:solidFill>
-                <a:latin typeface="Pretendard Medium"/>
+                  <a:srgbClr val="4D4D4D"/>
+                </a:solidFill>
+                <a:latin typeface="Pretendard"/>
               </a:defRPr>
             </a:pPr>
             <a:r>
               <a:rPr sz="1000" b="0">
                 <a:solidFill>
-                  <a:srgbClr val="171717"/>
-                </a:solidFill>
-                <a:latin typeface="Pretendard Medium"/>
-                <a:ea typeface="Pretendard Medium"/>
-                <a:cs typeface="Pretendard Medium"/>
+                  <a:srgbClr val="4D4D4D"/>
+                </a:solidFill>
+                <a:latin typeface="Pretendard"/>
+                <a:ea typeface="Pretendard"/>
+                <a:cs typeface="Pretendard"/>
               </a:rPr>
               <a:t>A + B</a:t>
             </a:r>
@@ -6146,8 +6146,8 @@
         </p:nvSpPr>
         <p:spPr>
           <a:xfrm>
-            <a:off x="2816352" y="5038344"/>
-            <a:ext cx="1051560" cy="859536"/>
+            <a:off x="2679191" y="5038344"/>
+            <a:ext cx="1097280" cy="859536"/>
           </a:xfrm>
           <a:prstGeom prst="rect">
             <a:avLst/>
@@ -6180,7 +6180,7 @@
                 <a:ea typeface="Pretendard"/>
                 <a:cs typeface="Pretendard"/>
               </a:rPr>
-              <a:t>점 수</a:t>
+              <a:t>표면 덮음</a:t>
             </a:r>
           </a:p>
           <a:p>
@@ -6204,7 +6204,7 @@
                 <a:ea typeface="Pretendard"/>
                 <a:cs typeface="Pretendard"/>
               </a:rPr>
-              <a:t>5,711</a:t>
+              <a:t>27.6%</a:t>
             </a:r>
           </a:p>
           <a:p>
@@ -6214,21 +6214,21 @@
               </a:lnSpc>
               <a:defRPr sz="1000">
                 <a:solidFill>
-                  <a:srgbClr val="4D4D4D"/>
-                </a:solidFill>
-                <a:latin typeface="Pretendard"/>
+                  <a:srgbClr val="171717"/>
+                </a:solidFill>
+                <a:latin typeface="Pretendard Medium"/>
               </a:defRPr>
             </a:pPr>
             <a:r>
               <a:rPr sz="1000" b="0">
                 <a:solidFill>
-                  <a:srgbClr val="4D4D4D"/>
-                </a:solidFill>
-                <a:latin typeface="Pretendard"/>
-                <a:ea typeface="Pretendard"/>
-                <a:cs typeface="Pretendard"/>
+                  <a:srgbClr val="171717"/>
+                </a:solidFill>
+                <a:latin typeface="Pretendard Medium"/>
+                <a:ea typeface="Pretendard Medium"/>
+                <a:cs typeface="Pretendard Medium"/>
               </a:rPr>
-              <a:t>9,762</a:t>
+              <a:t>96.6%</a:t>
             </a:r>
           </a:p>
           <a:p>
@@ -6238,21 +6238,21 @@
               </a:lnSpc>
               <a:defRPr sz="1000">
                 <a:solidFill>
-                  <a:srgbClr val="171717"/>
-                </a:solidFill>
-                <a:latin typeface="Pretendard Medium"/>
+                  <a:srgbClr val="4D4D4D"/>
+                </a:solidFill>
+                <a:latin typeface="Pretendard"/>
               </a:defRPr>
             </a:pPr>
             <a:r>
               <a:rPr sz="1000" b="0">
                 <a:solidFill>
-                  <a:srgbClr val="171717"/>
-                </a:solidFill>
-                <a:latin typeface="Pretendard Medium"/>
-                <a:ea typeface="Pretendard Medium"/>
-                <a:cs typeface="Pretendard Medium"/>
+                  <a:srgbClr val="4D4D4D"/>
+                </a:solidFill>
+                <a:latin typeface="Pretendard"/>
+                <a:ea typeface="Pretendard"/>
+                <a:cs typeface="Pretendard"/>
               </a:rPr>
-              <a:t>15,473</a:t>
+              <a:t>97.7%</a:t>
             </a:r>
           </a:p>
         </p:txBody>
@@ -6265,8 +6265,8 @@
         </p:nvSpPr>
         <p:spPr>
           <a:xfrm>
-            <a:off x="3867912" y="5038344"/>
-            <a:ext cx="1188720" cy="859536"/>
+            <a:off x="3776472" y="5038344"/>
+            <a:ext cx="868680" cy="859536"/>
           </a:xfrm>
           <a:prstGeom prst="rect">
             <a:avLst/>
@@ -6299,7 +6299,7 @@
                 <a:ea typeface="Pretendard"/>
                 <a:cs typeface="Pretendard"/>
               </a:rPr>
-              <a:t>표면 덮음</a:t>
+              <a:t>정밀도</a:t>
             </a:r>
           </a:p>
           <a:p>
@@ -6323,7 +6323,7 @@
                 <a:ea typeface="Pretendard"/>
                 <a:cs typeface="Pretendard"/>
               </a:rPr>
-              <a:t>27.6%</a:t>
+              <a:t>69.9%</a:t>
             </a:r>
           </a:p>
           <a:p>
@@ -6333,21 +6333,21 @@
               </a:lnSpc>
               <a:defRPr sz="1000">
                 <a:solidFill>
-                  <a:srgbClr val="4D4D4D"/>
-                </a:solidFill>
-                <a:latin typeface="Pretendard"/>
+                  <a:srgbClr val="171717"/>
+                </a:solidFill>
+                <a:latin typeface="Pretendard Medium"/>
               </a:defRPr>
             </a:pPr>
             <a:r>
               <a:rPr sz="1000" b="0">
                 <a:solidFill>
-                  <a:srgbClr val="4D4D4D"/>
-                </a:solidFill>
-                <a:latin typeface="Pretendard"/>
-                <a:ea typeface="Pretendard"/>
-                <a:cs typeface="Pretendard"/>
+                  <a:srgbClr val="171717"/>
+                </a:solidFill>
+                <a:latin typeface="Pretendard Medium"/>
+                <a:ea typeface="Pretendard Medium"/>
+                <a:cs typeface="Pretendard Medium"/>
               </a:rPr>
-              <a:t>96.6%</a:t>
+              <a:t>92.9%</a:t>
             </a:r>
           </a:p>
           <a:p>
@@ -6357,6 +6357,101 @@
               </a:lnSpc>
               <a:defRPr sz="1000">
                 <a:solidFill>
+                  <a:srgbClr val="4D4D4D"/>
+                </a:solidFill>
+                <a:latin typeface="Pretendard"/>
+              </a:defRPr>
+            </a:pPr>
+            <a:r>
+              <a:rPr sz="1000" b="0">
+                <a:solidFill>
+                  <a:srgbClr val="4D4D4D"/>
+                </a:solidFill>
+                <a:latin typeface="Pretendard"/>
+                <a:ea typeface="Pretendard"/>
+                <a:cs typeface="Pretendard"/>
+              </a:rPr>
+              <a:t>84.4%</a:t>
+            </a:r>
+          </a:p>
+        </p:txBody>
+      </p:sp>
+      <p:sp>
+        <p:nvSpPr>
+          <p:cNvPr id="14" name="TextBox 13"/>
+          <p:cNvSpPr txBox="1"/>
+          <p:nvPr/>
+        </p:nvSpPr>
+        <p:spPr>
+          <a:xfrm>
+            <a:off x="4645152" y="5038344"/>
+            <a:ext cx="685800" cy="859536"/>
+          </a:xfrm>
+          <a:prstGeom prst="rect">
+            <a:avLst/>
+          </a:prstGeom>
+          <a:noFill/>
+        </p:spPr>
+        <p:txBody>
+          <a:bodyPr wrap="none" lIns="0" rIns="0" tIns="0" bIns="0">
+            <a:spAutoFit/>
+          </a:bodyPr>
+          <a:lstStyle/>
+          <a:p>
+            <a:pPr algn="r">
+              <a:lnSpc>
+                <a:spcPct val="145000"/>
+              </a:lnSpc>
+              <a:defRPr sz="900">
+                <a:solidFill>
+                  <a:srgbClr val="8F8F8F"/>
+                </a:solidFill>
+                <a:latin typeface="Pretendard"/>
+              </a:defRPr>
+            </a:pPr>
+            <a:r>
+              <a:rPr sz="900" b="0">
+                <a:solidFill>
+                  <a:srgbClr val="8F8F8F"/>
+                </a:solidFill>
+                <a:latin typeface="Pretendard"/>
+                <a:ea typeface="Pretendard"/>
+                <a:cs typeface="Pretendard"/>
+              </a:rPr>
+              <a:t>F</a:t>
+            </a:r>
+          </a:p>
+          <a:p>
+            <a:pPr algn="r">
+              <a:lnSpc>
+                <a:spcPct val="145000"/>
+              </a:lnSpc>
+              <a:defRPr sz="1000">
+                <a:solidFill>
+                  <a:srgbClr val="4D4D4D"/>
+                </a:solidFill>
+                <a:latin typeface="Pretendard"/>
+              </a:defRPr>
+            </a:pPr>
+            <a:r>
+              <a:rPr sz="1000" b="0">
+                <a:solidFill>
+                  <a:srgbClr val="4D4D4D"/>
+                </a:solidFill>
+                <a:latin typeface="Pretendard"/>
+                <a:ea typeface="Pretendard"/>
+                <a:cs typeface="Pretendard"/>
+              </a:rPr>
+              <a:t>40</a:t>
+            </a:r>
+          </a:p>
+          <a:p>
+            <a:pPr algn="r">
+              <a:lnSpc>
+                <a:spcPct val="145000"/>
+              </a:lnSpc>
+              <a:defRPr sz="1000">
+                <a:solidFill>
                   <a:srgbClr val="171717"/>
                 </a:solidFill>
                 <a:latin typeface="Pretendard Medium"/>
@@ -6371,14 +6466,38 @@
                 <a:ea typeface="Pretendard Medium"/>
                 <a:cs typeface="Pretendard Medium"/>
               </a:rPr>
-              <a:t>97.7%</a:t>
-            </a:r>
-          </a:p>
-        </p:txBody>
-      </p:sp>
-      <p:sp>
-        <p:nvSpPr>
-          <p:cNvPr id="14" name="Rounded Rectangle 13"/>
+              <a:t>95</a:t>
+            </a:r>
+          </a:p>
+          <a:p>
+            <a:pPr algn="r">
+              <a:lnSpc>
+                <a:spcPct val="145000"/>
+              </a:lnSpc>
+              <a:defRPr sz="1000">
+                <a:solidFill>
+                  <a:srgbClr val="4D4D4D"/>
+                </a:solidFill>
+                <a:latin typeface="Pretendard"/>
+              </a:defRPr>
+            </a:pPr>
+            <a:r>
+              <a:rPr sz="1000" b="0">
+                <a:solidFill>
+                  <a:srgbClr val="4D4D4D"/>
+                </a:solidFill>
+                <a:latin typeface="Pretendard"/>
+                <a:ea typeface="Pretendard"/>
+                <a:cs typeface="Pretendard"/>
+              </a:rPr>
+              <a:t>91</a:t>
+            </a:r>
+          </a:p>
+        </p:txBody>
+      </p:sp>
+      <p:sp>
+        <p:nvSpPr>
+          <p:cNvPr id="15" name="Rounded Rectangle 14"/>
           <p:cNvSpPr/>
           <p:nvPr/>
         </p:nvSpPr>
@@ -6426,7 +6545,7 @@
       </p:sp>
       <p:sp>
         <p:nvSpPr>
-          <p:cNvPr id="15" name="TextBox 14"/>
+          <p:cNvPr id="16" name="TextBox 15"/>
           <p:cNvSpPr txBox="1"/>
           <p:nvPr/>
         </p:nvSpPr>
@@ -6466,14 +6585,14 @@
                 <a:ea typeface="Pretendard SemiBold"/>
                 <a:cs typeface="Pretendard SemiBold"/>
               </a:rPr>
-              <a:t>같은 시점에서 두 깊이 맵을 비교하면</a:t>
-            </a:r>
-          </a:p>
-        </p:txBody>
-      </p:sp>
-      <p:sp>
-        <p:nvSpPr>
-          <p:cNvPr id="16" name="TextBox 15"/>
+              <a:t>합치지 않은 이유 — 겹침을 쟀습니다</a:t>
+            </a:r>
+          </a:p>
+        </p:txBody>
+      </p:sp>
+      <p:sp>
+        <p:nvSpPr>
+          <p:cNvPr id="17" name="TextBox 16"/>
           <p:cNvSpPr txBox="1"/>
           <p:nvPr/>
         </p:nvSpPr>
@@ -6513,7 +6632,7 @@
                 <a:ea typeface="Pretendard Medium"/>
                 <a:cs typeface="Pretendard Medium"/>
               </a:rPr>
-              <a:t>A 오차 중앙값 0.9 cm · 유효화소 60%   (영상 2장)</a:t>
+              <a:t>A 가 덮는 것의 96% 는 B 도 덮습니다. 고유 기여는 1.1%p.</a:t>
             </a:r>
           </a:p>
           <a:p>
@@ -6523,21 +6642,21 @@
               </a:lnSpc>
               <a:defRPr sz="1000">
                 <a:solidFill>
-                  <a:srgbClr val="171717"/>
-                </a:solidFill>
-                <a:latin typeface="Pretendard Medium"/>
+                  <a:srgbClr val="4D4D4D"/>
+                </a:solidFill>
+                <a:latin typeface="Pretendard"/>
               </a:defRPr>
             </a:pPr>
             <a:r>
               <a:rPr sz="1000" b="0">
                 <a:solidFill>
-                  <a:srgbClr val="171717"/>
-                </a:solidFill>
-                <a:latin typeface="Pretendard Medium"/>
-                <a:ea typeface="Pretendard Medium"/>
-                <a:cs typeface="Pretendard Medium"/>
+                  <a:srgbClr val="4D4D4D"/>
+                </a:solidFill>
+                <a:latin typeface="Pretendard"/>
+                <a:ea typeface="Pretendard"/>
+                <a:cs typeface="Pretendard"/>
               </a:rPr>
-              <a:t>B 오차 중앙값 0.4 cm · 유효화소 100%   (마스크 20장)</a:t>
+              <a:t>합치면 커버리지가 1.1%p 오르는 대신 정밀도가 8.5%p 깎입니다.</a:t>
             </a:r>
           </a:p>
           <a:p>
@@ -6585,7 +6704,7 @@
                 <a:ea typeface="Pretendard"/>
                 <a:cs typeface="Pretendard"/>
               </a:rPr>
-              <a:t>B 가 낫지만 입력이 열 배 많고 마스크는 정답입니다.</a:t>
+              <a:t>A 가 남는 이유는 성능이 아니라 입력입니다.</a:t>
             </a:r>
           </a:p>
           <a:p>
@@ -6609,7 +6728,7 @@
                 <a:ea typeface="Pretendard"/>
                 <a:cs typeface="Pretendard"/>
               </a:rPr>
-              <a:t>어느 쪽이 낫다가 아니라 필요한 입력이 다른 두 경로입니다.</a:t>
+              <a:t>B 는 실루엣 마스크가 없으면 아예 동작하지 않습니다.</a:t>
             </a:r>
           </a:p>
         </p:txBody>

--- a/02_2d_to_3d/report/2차업무_정승원.pptx
+++ b/02_2d_to_3d/report/2차업무_정승원.pptx
@@ -5753,7 +5753,7 @@
                 <a:ea typeface="Pretendard SemiBold"/>
                 <a:cs typeface="Pretendard SemiBold"/>
               </a:rPr>
-              <a:t>실루엣 카빙으로 타겟 표면의 97% 를 복원했습니다</a:t>
+              <a:t>깊이 맵으로 표면의 28%, 실루엣으로 97% 를 복원했습니다</a:t>
             </a:r>
           </a:p>
         </p:txBody>
@@ -5800,7 +5800,7 @@
                 <a:ea typeface="Pretendard"/>
                 <a:cs typeface="Pretendard"/>
               </a:rPr>
-              <a:t>참고자료가 가리키는 스테레오부터 했지만 표면의 28% 에서 멈춰 갈아탔습니다 · 정답 메시 40만 점 중 복원점이 2 cm 안에 있는 비율</a:t>
+              <a:t>깊이를 재는 것은 스테레오뿐입니다 · 카빙은 물체가 없는 공간을 지우는 방식이라 거리를 재지 않습니다 · 표면 커버리지는 정답 메시 40만 점 기준</a:t>
             </a:r>
           </a:p>
         </p:txBody>
